--- a/Project_Progress_Presentation.pptx
+++ b/Project_Progress_Presentation.pptx
@@ -21,6 +21,7 @@
     <p:sldId id="269" r:id="rId20"/>
     <p:sldId id="270" r:id="rId21"/>
     <p:sldId id="271" r:id="rId22"/>
+    <p:sldId id="272" r:id="rId23"/>
   </p:sldIdLst>
   <p:sldSz cx="9144000" cy="6858000" type="screen4x3"/>
   <p:notesSz cx="6858000" cy="9144000"/>
@@ -3166,7 +3167,6 @@
           <a:ln>
             <a:noFill/>
           </a:ln>
-          <a:effectLst/>
         </p:spPr>
         <p:style>
           <a:lnRef idx="1">
@@ -3431,7 +3431,7 @@
                   <a:srgbClr val="555555"/>
                 </a:solidFill>
               </a:rPr>
-              <a:t>Professor, Dept. of CSE, MIT Manipal</a:t>
+              <a:t>Dept. of CSE, MIT Manipal</a:t>
             </a:r>
           </a:p>
         </p:txBody>
@@ -3465,7 +3465,7 @@
                   <a:srgbClr val="202020"/>
                 </a:solidFill>
               </a:rPr>
-              <a:t>June 2026</a:t>
+              <a:t>July 2026</a:t>
             </a:r>
           </a:p>
         </p:txBody>
@@ -3506,12 +3506,12 @@
           </a:fontRef>
         </p:style>
         <p:txBody>
-          <a:bodyPr rtlCol="0" anchor="ctr" tIns="25400" bIns="25400"/>
-          <a:lstStyle/>
-          <a:p>
-            <a:pPr algn="l"/>
-            <a:r>
-              <a:rPr sz="1100" b="1">
+          <a:bodyPr rtlCol="0" anchor="ctr"/>
+          <a:lstStyle/>
+          <a:p>
+            <a:pPr algn="ctr"/>
+            <a:r>
+              <a:rPr sz="1000" b="1">
                 <a:solidFill>
                   <a:srgbClr val="FFFFFF"/>
                 </a:solidFill>
@@ -3545,12 +3545,12 @@
           <a:p>
             <a:pPr algn="r"/>
             <a:r>
-              <a:rPr sz="1100" b="1">
+              <a:rPr sz="1000" b="1">
                 <a:solidFill>
                   <a:srgbClr val="FFFFFF"/>
                 </a:solidFill>
               </a:rPr>
-              <a:t>1/ 16</a:t>
+              <a:t>1/ 17</a:t>
             </a:r>
           </a:p>
         </p:txBody>
@@ -3609,17 +3609,17 @@
           </a:fontRef>
         </p:style>
         <p:txBody>
-          <a:bodyPr rtlCol="0" anchor="ctr" wrap="square"/>
-          <a:lstStyle/>
-          <a:p>
-            <a:pPr algn="l"/>
-            <a:r>
-              <a:rPr sz="2600" b="1">
+          <a:bodyPr rtlCol="0" anchor="ctr"/>
+          <a:lstStyle/>
+          <a:p>
+            <a:pPr algn="ctr"/>
+            <a:r>
+              <a:rPr sz="2500" b="1">
                 <a:solidFill>
                   <a:srgbClr val="FFFFFF"/>
                 </a:solidFill>
               </a:rPr>
-              <a:t>  8.  Prototype — Sentinel UI</a:t>
+              <a:t>  8.  Status — available but DISABLED by default</a:t>
             </a:r>
           </a:p>
         </p:txBody>
@@ -3660,12 +3660,12 @@
           </a:fontRef>
         </p:style>
         <p:txBody>
-          <a:bodyPr rtlCol="0" anchor="ctr" tIns="25400" bIns="25400"/>
-          <a:lstStyle/>
-          <a:p>
-            <a:pPr algn="l"/>
-            <a:r>
-              <a:rPr sz="1100" b="1">
+          <a:bodyPr rtlCol="0" anchor="ctr"/>
+          <a:lstStyle/>
+          <a:p>
+            <a:pPr algn="ctr"/>
+            <a:r>
+              <a:rPr sz="1000" b="1">
                 <a:solidFill>
                   <a:srgbClr val="FFFFFF"/>
                 </a:solidFill>
@@ -3699,74 +3699,26 @@
           <a:p>
             <a:pPr algn="r"/>
             <a:r>
-              <a:rPr sz="1100" b="1">
+              <a:rPr sz="1000" b="1">
                 <a:solidFill>
                   <a:srgbClr val="FFFFFF"/>
                 </a:solidFill>
               </a:rPr>
-              <a:t>10/ 16</a:t>
-            </a:r>
-          </a:p>
-        </p:txBody>
-      </p:sp>
-      <p:pic>
-        <p:nvPicPr>
-          <p:cNvPr id="5" name="Picture 4" descr="2-legit-github_crop.png"/>
-          <p:cNvPicPr>
-            <a:picLocks noChangeAspect="1"/>
-          </p:cNvPicPr>
-          <p:nvPr/>
-        </p:nvPicPr>
-        <p:blipFill>
-          <a:blip r:embed="rId2"/>
-          <a:stretch>
-            <a:fillRect/>
-          </a:stretch>
-        </p:blipFill>
-        <p:spPr>
-          <a:xfrm>
-            <a:off x="411480" y="1097280"/>
-            <a:ext cx="2920864" cy="3840480"/>
-          </a:xfrm>
-          <a:prstGeom prst="rect">
-            <a:avLst/>
-          </a:prstGeom>
-        </p:spPr>
-      </p:pic>
-      <p:pic>
-        <p:nvPicPr>
-          <p:cNvPr id="6" name="Picture 5" descr="1-phishing-url_crop.png"/>
-          <p:cNvPicPr>
-            <a:picLocks noChangeAspect="1"/>
-          </p:cNvPicPr>
-          <p:nvPr/>
-        </p:nvPicPr>
-        <p:blipFill>
-          <a:blip r:embed="rId3"/>
-          <a:stretch>
-            <a:fillRect/>
-          </a:stretch>
-        </p:blipFill>
-        <p:spPr>
-          <a:xfrm>
-            <a:off x="4709160" y="1097280"/>
-            <a:ext cx="2883176" cy="3840480"/>
-          </a:xfrm>
-          <a:prstGeom prst="rect">
-            <a:avLst/>
-          </a:prstGeom>
-        </p:spPr>
-      </p:pic>
-      <p:sp>
-        <p:nvSpPr>
-          <p:cNvPr id="7" name="TextBox 6"/>
+              <a:t>10/ 17</a:t>
+            </a:r>
+          </a:p>
+        </p:txBody>
+      </p:sp>
+      <p:sp>
+        <p:nvSpPr>
+          <p:cNvPr id="5" name="TextBox 4"/>
           <p:cNvSpPr txBox="1"/>
           <p:nvPr/>
         </p:nvSpPr>
         <p:spPr>
           <a:xfrm>
-            <a:off x="411480" y="5029200"/>
-            <a:ext cx="4023360" cy="365760"/>
+            <a:off x="640080" y="868680"/>
+            <a:ext cx="7863840" cy="457200"/>
           </a:xfrm>
           <a:prstGeom prst="rect">
             <a:avLst/>
@@ -3781,26 +3733,26 @@
           <a:p>
             <a:pPr algn="ctr"/>
             <a:r>
-              <a:rPr sz="1300" b="1">
-                <a:solidFill>
-                  <a:srgbClr val="2E2E8F"/>
-                </a:solidFill>
-              </a:rPr>
-              <a:t>Legitimate site  →  Likely Safe (green)</a:t>
-            </a:r>
-          </a:p>
-        </p:txBody>
-      </p:sp>
-      <p:sp>
-        <p:nvSpPr>
-          <p:cNvPr id="8" name="TextBox 7"/>
+              <a:rPr sz="1200" b="0" i="1">
+                <a:solidFill>
+                  <a:srgbClr val="555555"/>
+                </a:solidFill>
+              </a:rPr>
+              <a:t>Built &amp; tested, but off so the core runs offline with no heavy deps</a:t>
+            </a:r>
+          </a:p>
+        </p:txBody>
+      </p:sp>
+      <p:sp>
+        <p:nvSpPr>
+          <p:cNvPr id="6" name="TextBox 5"/>
           <p:cNvSpPr txBox="1"/>
           <p:nvPr/>
         </p:nvSpPr>
         <p:spPr>
           <a:xfrm>
-            <a:off x="4709160" y="5029200"/>
-            <a:ext cx="4023360" cy="365760"/>
+            <a:off x="502920" y="1234440"/>
+            <a:ext cx="8183879" cy="5212080"/>
           </a:xfrm>
           <a:prstGeom prst="rect">
             <a:avLst/>
@@ -3808,19 +3760,169 @@
           <a:noFill/>
         </p:spPr>
         <p:txBody>
-          <a:bodyPr wrap="none">
+          <a:bodyPr wrap="square">
             <a:spAutoFit/>
           </a:bodyPr>
           <a:lstStyle/>
           <a:p>
-            <a:pPr algn="ctr"/>
-            <a:r>
-              <a:rPr sz="1300" b="1">
+            <a:pPr>
+              <a:spcAft>
+                <a:spcPts val="600"/>
+              </a:spcAft>
+            </a:pPr>
+            <a:r>
+              <a:rPr sz="1500" b="1">
                 <a:solidFill>
                   <a:srgbClr val="2E2E8F"/>
                 </a:solidFill>
               </a:rPr>
-              <a:t>Phishing URL  →  High Risk (red)</a:t>
+              <a:t>▸ </a:t>
+            </a:r>
+            <a:r>
+              <a:rPr sz="1500">
+                <a:solidFill>
+                  <a:srgbClr val="202020"/>
+                </a:solidFill>
+              </a:rPr>
+              <a:t>LLM explanation (USE_LLM=false) — wording-only; NEVER changes the score/verdict.</a:t>
+            </a:r>
+          </a:p>
+          <a:p>
+            <a:pPr>
+              <a:spcAft>
+                <a:spcPts val="600"/>
+              </a:spcAft>
+            </a:pPr>
+            <a:r>
+              <a:rPr sz="1500" b="1">
+                <a:solidFill>
+                  <a:srgbClr val="2E2E8F"/>
+                </a:solidFill>
+              </a:rPr>
+              <a:t>▸ </a:t>
+            </a:r>
+            <a:r>
+              <a:rPr sz="1500">
+                <a:solidFill>
+                  <a:srgbClr val="202020"/>
+                </a:solidFill>
+              </a:rPr>
+              <a:t>Embedding RAG, MiniLM + Chroma (RETRIEVER_BACKEND=tfidf) — auto-falls back to TF-IDF.</a:t>
+            </a:r>
+          </a:p>
+          <a:p>
+            <a:pPr>
+              <a:spcAft>
+                <a:spcPts val="600"/>
+              </a:spcAft>
+            </a:pPr>
+            <a:r>
+              <a:rPr sz="1500" b="1">
+                <a:solidFill>
+                  <a:srgbClr val="2E2E8F"/>
+                </a:solidFill>
+              </a:rPr>
+              <a:t>▸ </a:t>
+            </a:r>
+            <a:r>
+              <a:rPr sz="1500">
+                <a:solidFill>
+                  <a:srgbClr val="202020"/>
+                </a:solidFill>
+              </a:rPr>
+              <a:t>Playwright render backend (RENDER_BACKEND=requests).</a:t>
+            </a:r>
+          </a:p>
+          <a:p>
+            <a:pPr>
+              <a:spcAft>
+                <a:spcPts val="600"/>
+              </a:spcAft>
+            </a:pPr>
+            <a:r>
+              <a:rPr sz="1500" b="1">
+                <a:solidFill>
+                  <a:srgbClr val="2E2E8F"/>
+                </a:solidFill>
+              </a:rPr>
+              <a:t>▸ </a:t>
+            </a:r>
+            <a:r>
+              <a:rPr sz="1500">
+                <a:solidFill>
+                  <a:srgbClr val="202020"/>
+                </a:solidFill>
+              </a:rPr>
+              <a:t>Multimodal screenshot + OCR (USE_MULTIMODAL=false).</a:t>
+            </a:r>
+          </a:p>
+          <a:p>
+            <a:pPr>
+              <a:spcAft>
+                <a:spcPts val="600"/>
+              </a:spcAft>
+            </a:pPr>
+            <a:r>
+              <a:rPr sz="1500" b="1">
+                <a:solidFill>
+                  <a:srgbClr val="2E2E8F"/>
+                </a:solidFill>
+              </a:rPr>
+              <a:t>▸ </a:t>
+            </a:r>
+            <a:r>
+              <a:rPr sz="1500">
+                <a:solidFill>
+                  <a:srgbClr val="202020"/>
+                </a:solidFill>
+              </a:rPr>
+              <a:t>Dynamic-analysis cloaking diff — runs only with the Playwright backend.</a:t>
+            </a:r>
+          </a:p>
+          <a:p>
+            <a:pPr>
+              <a:spcAft>
+                <a:spcPts val="600"/>
+              </a:spcAft>
+            </a:pPr>
+            <a:r>
+              <a:rPr sz="1500" b="1">
+                <a:solidFill>
+                  <a:srgbClr val="2E2E8F"/>
+                </a:solidFill>
+              </a:rPr>
+              <a:t>▸ </a:t>
+            </a:r>
+            <a:r>
+              <a:rPr sz="1500">
+                <a:solidFill>
+                  <a:srgbClr val="202020"/>
+                </a:solidFill>
+              </a:rPr>
+              <a:t>Geo/ASN conflict type — needs a local GeoIP DB; INACTIVE by default (never fires). Other conflict types still run.</a:t>
+            </a:r>
+          </a:p>
+          <a:p>
+            <a:pPr>
+              <a:spcAft>
+                <a:spcPts val="600"/>
+              </a:spcAft>
+            </a:pPr>
+            <a:r>
+              <a:rPr sz="1500" b="1">
+                <a:solidFill>
+                  <a:srgbClr val="2E2E8F"/>
+                </a:solidFill>
+              </a:rPr>
+              <a:t>▸ </a:t>
+            </a:r>
+            <a:r>
+              <a:rPr sz="1500">
+                <a:solidFill>
+                  <a:srgbClr val="202020"/>
+                </a:solidFill>
+              </a:rPr>
+              <a:t>PhishTank feed — needs an API key; OpenPhish is the feed that actually runs.</a:t>
             </a:r>
           </a:p>
         </p:txBody>
@@ -3879,17 +3981,17 @@
           </a:fontRef>
         </p:style>
         <p:txBody>
-          <a:bodyPr rtlCol="0" anchor="ctr" wrap="square"/>
-          <a:lstStyle/>
-          <a:p>
-            <a:pPr algn="l"/>
-            <a:r>
-              <a:rPr sz="2600" b="1">
+          <a:bodyPr rtlCol="0" anchor="ctr"/>
+          <a:lstStyle/>
+          <a:p>
+            <a:pPr algn="ctr"/>
+            <a:r>
+              <a:rPr sz="2500" b="1">
                 <a:solidFill>
                   <a:srgbClr val="FFFFFF"/>
                 </a:solidFill>
               </a:rPr>
-              <a:t>  8.  Representative Results</a:t>
+              <a:t>  9.  Genuine future work (not yet built)</a:t>
             </a:r>
           </a:p>
         </p:txBody>
@@ -3930,12 +4032,12 @@
           </a:fontRef>
         </p:style>
         <p:txBody>
-          <a:bodyPr rtlCol="0" anchor="ctr" tIns="25400" bIns="25400"/>
-          <a:lstStyle/>
-          <a:p>
-            <a:pPr algn="l"/>
-            <a:r>
-              <a:rPr sz="1100" b="1">
+          <a:bodyPr rtlCol="0" anchor="ctr"/>
+          <a:lstStyle/>
+          <a:p>
+            <a:pPr algn="ctr"/>
+            <a:r>
+              <a:rPr sz="1000" b="1">
                 <a:solidFill>
                   <a:srgbClr val="FFFFFF"/>
                 </a:solidFill>
@@ -3969,27 +4071,434 @@
           <a:p>
             <a:pPr algn="r"/>
             <a:r>
-              <a:rPr sz="1100" b="1">
+              <a:rPr sz="1000" b="1">
                 <a:solidFill>
                   <a:srgbClr val="FFFFFF"/>
                 </a:solidFill>
               </a:rPr>
-              <a:t>11/ 16</a:t>
+              <a:t>11/ 17</a:t>
+            </a:r>
+          </a:p>
+        </p:txBody>
+      </p:sp>
+      <p:sp>
+        <p:nvSpPr>
+          <p:cNvPr id="5" name="TextBox 4"/>
+          <p:cNvSpPr txBox="1"/>
+          <p:nvPr/>
+        </p:nvSpPr>
+        <p:spPr>
+          <a:xfrm>
+            <a:off x="502920" y="1005840"/>
+            <a:ext cx="8183879" cy="5212080"/>
+          </a:xfrm>
+          <a:prstGeom prst="rect">
+            <a:avLst/>
+          </a:prstGeom>
+          <a:noFill/>
+        </p:spPr>
+        <p:txBody>
+          <a:bodyPr wrap="square">
+            <a:spAutoFit/>
+          </a:bodyPr>
+          <a:lstStyle/>
+          <a:p>
+            <a:pPr>
+              <a:spcAft>
+                <a:spcPts val="600"/>
+              </a:spcAft>
+            </a:pPr>
+            <a:r>
+              <a:rPr sz="1700" b="1">
+                <a:solidFill>
+                  <a:srgbClr val="2E2E8F"/>
+                </a:solidFill>
+              </a:rPr>
+              <a:t>▸ </a:t>
+            </a:r>
+            <a:r>
+              <a:rPr sz="1700">
+                <a:solidFill>
+                  <a:srgbClr val="202020"/>
+                </a:solidFill>
+              </a:rPr>
+              <a:t>A trained ML / deep-learning classifier (current classifier is the rule engine, by design).</a:t>
+            </a:r>
+          </a:p>
+          <a:p>
+            <a:pPr>
+              <a:spcAft>
+                <a:spcPts val="600"/>
+              </a:spcAft>
+            </a:pPr>
+            <a:r>
+              <a:rPr sz="1700" b="1">
+                <a:solidFill>
+                  <a:srgbClr val="2E2E8F"/>
+                </a:solidFill>
+              </a:rPr>
+              <a:t>▸ </a:t>
+            </a:r>
+            <a:r>
+              <a:rPr sz="1700">
+                <a:solidFill>
+                  <a:srgbClr val="202020"/>
+                </a:solidFill>
+              </a:rPr>
+              <a:t>LLM-backed CLASSIFICATION (today the LLM is wording-only, not a classifier).</a:t>
+            </a:r>
+          </a:p>
+          <a:p>
+            <a:pPr>
+              <a:spcAft>
+                <a:spcPts val="600"/>
+              </a:spcAft>
+            </a:pPr>
+            <a:r>
+              <a:rPr sz="1700" b="1">
+                <a:solidFill>
+                  <a:srgbClr val="2E2E8F"/>
+                </a:solidFill>
+              </a:rPr>
+              <a:t>▸ </a:t>
+            </a:r>
+            <a:r>
+              <a:rPr sz="1700">
+                <a:solidFill>
+                  <a:srgbClr val="202020"/>
+                </a:solidFill>
+              </a:rPr>
+              <a:t>Large-scale labelled evaluation with published metrics (harness exists; runs are small-sample).</a:t>
+            </a:r>
+          </a:p>
+          <a:p>
+            <a:pPr>
+              <a:spcAft>
+                <a:spcPts val="600"/>
+              </a:spcAft>
+            </a:pPr>
+            <a:r>
+              <a:rPr sz="1700" b="1">
+                <a:solidFill>
+                  <a:srgbClr val="2E2E8F"/>
+                </a:solidFill>
+              </a:rPr>
+              <a:t>▸ </a:t>
+            </a:r>
+            <a:r>
+              <a:rPr sz="1700">
+                <a:solidFill>
+                  <a:srgbClr val="202020"/>
+                </a:solidFill>
+              </a:rPr>
+              <a:t>Browser-extension front-end and deployment.</a:t>
+            </a:r>
+          </a:p>
+          <a:p>
+            <a:pPr>
+              <a:spcAft>
+                <a:spcPts val="600"/>
+              </a:spcAft>
+            </a:pPr>
+            <a:r>
+              <a:rPr sz="1700" b="1">
+                <a:solidFill>
+                  <a:srgbClr val="2E2E8F"/>
+                </a:solidFill>
+              </a:rPr>
+              <a:t>▸ </a:t>
+            </a:r>
+            <a:r>
+              <a:rPr sz="1700">
+                <a:solidFill>
+                  <a:srgbClr val="202020"/>
+                </a:solidFill>
+              </a:rPr>
+              <a:t>Multi-agent LLM debate.</a:t>
+            </a:r>
+          </a:p>
+          <a:p>
+            <a:pPr>
+              <a:spcAft>
+                <a:spcPts val="600"/>
+              </a:spcAft>
+            </a:pPr>
+            <a:r>
+              <a:rPr sz="1700" b="1">
+                <a:solidFill>
+                  <a:srgbClr val="2E2E8F"/>
+                </a:solidFill>
+              </a:rPr>
+              <a:t>▸ </a:t>
+            </a:r>
+            <a:r>
+              <a:rPr sz="1700">
+                <a:solidFill>
+                  <a:srgbClr val="202020"/>
+                </a:solidFill>
+              </a:rPr>
+              <a:t>Dedicated UI panels for the newer detection stages (they already flow into the score &amp; JSON).</a:t>
+            </a:r>
+          </a:p>
+        </p:txBody>
+      </p:sp>
+    </p:spTree>
+  </p:cSld>
+  <p:clrMapOvr>
+    <a:masterClrMapping/>
+  </p:clrMapOvr>
+</p:sld>
+</file>
+
+<file path=ppt/slides/slide12.xml><?xml version="1.0" encoding="utf-8"?>
+<p:sld xmlns:a="http://schemas.openxmlformats.org/drawingml/2006/main" xmlns:p="http://schemas.openxmlformats.org/presentationml/2006/main" xmlns:r="http://schemas.openxmlformats.org/officeDocument/2006/relationships">
+  <p:cSld>
+    <p:spTree>
+      <p:nvGrpSpPr>
+        <p:cNvPr id="1" name=""/>
+        <p:cNvGrpSpPr/>
+        <p:nvPr/>
+      </p:nvGrpSpPr>
+      <p:grpSpPr/>
+      <p:sp>
+        <p:nvSpPr>
+          <p:cNvPr id="2" name="Rectangle 1"/>
+          <p:cNvSpPr/>
+          <p:nvPr/>
+        </p:nvSpPr>
+        <p:spPr>
+          <a:xfrm>
+            <a:off x="0" y="0"/>
+            <a:ext cx="9144000" cy="777240"/>
+          </a:xfrm>
+          <a:prstGeom prst="rect">
+            <a:avLst/>
+          </a:prstGeom>
+          <a:solidFill>
+            <a:srgbClr val="2E2E8F"/>
+          </a:solidFill>
+          <a:ln>
+            <a:noFill/>
+          </a:ln>
+        </p:spPr>
+        <p:style>
+          <a:lnRef idx="1">
+            <a:schemeClr val="accent1"/>
+          </a:lnRef>
+          <a:fillRef idx="3">
+            <a:schemeClr val="accent1"/>
+          </a:fillRef>
+          <a:effectRef idx="2">
+            <a:schemeClr val="accent1"/>
+          </a:effectRef>
+          <a:fontRef idx="minor">
+            <a:schemeClr val="lt1"/>
+          </a:fontRef>
+        </p:style>
+        <p:txBody>
+          <a:bodyPr rtlCol="0" anchor="ctr"/>
+          <a:lstStyle/>
+          <a:p>
+            <a:pPr algn="ctr"/>
+            <a:r>
+              <a:rPr sz="2500" b="1">
+                <a:solidFill>
+                  <a:srgbClr val="FFFFFF"/>
+                </a:solidFill>
+              </a:rPr>
+              <a:t>  10.  Testing &amp; Evaluation</a:t>
+            </a:r>
+          </a:p>
+        </p:txBody>
+      </p:sp>
+      <p:sp>
+        <p:nvSpPr>
+          <p:cNvPr id="3" name="Rectangle 2"/>
+          <p:cNvSpPr/>
+          <p:nvPr/>
+        </p:nvSpPr>
+        <p:spPr>
+          <a:xfrm>
+            <a:off x="0" y="6446520"/>
+            <a:ext cx="9144000" cy="411480"/>
+          </a:xfrm>
+          <a:prstGeom prst="rect">
+            <a:avLst/>
+          </a:prstGeom>
+          <a:solidFill>
+            <a:srgbClr val="2E2E8F"/>
+          </a:solidFill>
+          <a:ln>
+            <a:noFill/>
+          </a:ln>
+        </p:spPr>
+        <p:style>
+          <a:lnRef idx="1">
+            <a:schemeClr val="accent1"/>
+          </a:lnRef>
+          <a:fillRef idx="3">
+            <a:schemeClr val="accent1"/>
+          </a:fillRef>
+          <a:effectRef idx="2">
+            <a:schemeClr val="accent1"/>
+          </a:effectRef>
+          <a:fontRef idx="minor">
+            <a:schemeClr val="lt1"/>
+          </a:fontRef>
+        </p:style>
+        <p:txBody>
+          <a:bodyPr rtlCol="0" anchor="ctr"/>
+          <a:lstStyle/>
+          <a:p>
+            <a:pPr algn="ctr"/>
+            <a:r>
+              <a:rPr sz="1000" b="1">
+                <a:solidFill>
+                  <a:srgbClr val="FFFFFF"/>
+                </a:solidFill>
+              </a:rPr>
+              <a:t>  Department of Computer Science and Engineering</a:t>
+            </a:r>
+          </a:p>
+        </p:txBody>
+      </p:sp>
+      <p:sp>
+        <p:nvSpPr>
+          <p:cNvPr id="4" name="TextBox 3"/>
+          <p:cNvSpPr txBox="1"/>
+          <p:nvPr/>
+        </p:nvSpPr>
+        <p:spPr>
+          <a:xfrm>
+            <a:off x="7680960" y="6464808"/>
+            <a:ext cx="1371600" cy="365760"/>
+          </a:xfrm>
+          <a:prstGeom prst="rect">
+            <a:avLst/>
+          </a:prstGeom>
+          <a:noFill/>
+        </p:spPr>
+        <p:txBody>
+          <a:bodyPr wrap="none">
+            <a:spAutoFit/>
+          </a:bodyPr>
+          <a:lstStyle/>
+          <a:p>
+            <a:pPr algn="r"/>
+            <a:r>
+              <a:rPr sz="1000" b="1">
+                <a:solidFill>
+                  <a:srgbClr val="FFFFFF"/>
+                </a:solidFill>
+              </a:rPr>
+              <a:t>12/ 17</a:t>
+            </a:r>
+          </a:p>
+        </p:txBody>
+      </p:sp>
+      <p:sp>
+        <p:nvSpPr>
+          <p:cNvPr id="5" name="TextBox 4"/>
+          <p:cNvSpPr txBox="1"/>
+          <p:nvPr/>
+        </p:nvSpPr>
+        <p:spPr>
+          <a:xfrm>
+            <a:off x="502920" y="1051560"/>
+            <a:ext cx="8183879" cy="5212080"/>
+          </a:xfrm>
+          <a:prstGeom prst="rect">
+            <a:avLst/>
+          </a:prstGeom>
+          <a:noFill/>
+        </p:spPr>
+        <p:txBody>
+          <a:bodyPr wrap="square">
+            <a:spAutoFit/>
+          </a:bodyPr>
+          <a:lstStyle/>
+          <a:p>
+            <a:pPr>
+              <a:spcAft>
+                <a:spcPts val="600"/>
+              </a:spcAft>
+            </a:pPr>
+            <a:r>
+              <a:rPr sz="1600" b="1">
+                <a:solidFill>
+                  <a:srgbClr val="2E2E8F"/>
+                </a:solidFill>
+              </a:rPr>
+              <a:t>▸ </a:t>
+            </a:r>
+            <a:r>
+              <a:rPr sz="1600">
+                <a:solidFill>
+                  <a:srgbClr val="202020"/>
+                </a:solidFill>
+              </a:rPr>
+              <a:t>Unit/integration tests: 175 passing, 4 skipped (embedding-backend, optional deps).</a:t>
+            </a:r>
+          </a:p>
+          <a:p>
+            <a:pPr>
+              <a:spcAft>
+                <a:spcPts val="600"/>
+              </a:spcAft>
+            </a:pPr>
+            <a:r>
+              <a:rPr sz="1600" b="1">
+                <a:solidFill>
+                  <a:srgbClr val="2E2E8F"/>
+                </a:solidFill>
+              </a:rPr>
+              <a:t>▸ </a:t>
+            </a:r>
+            <a:r>
+              <a:rPr sz="1600">
+                <a:solidFill>
+                  <a:srgbClr val="202020"/>
+                </a:solidFill>
+              </a:rPr>
+              <a:t>Reproducible harness: 300 benign (Tranco) + 300 phishing (OpenPhish), seeded.</a:t>
+            </a:r>
+          </a:p>
+          <a:p>
+            <a:pPr>
+              <a:spcAft>
+                <a:spcPts val="600"/>
+              </a:spcAft>
+            </a:pPr>
+            <a:r>
+              <a:rPr sz="1600" b="1">
+                <a:solidFill>
+                  <a:srgbClr val="2E2E8F"/>
+                </a:solidFill>
+              </a:rPr>
+              <a:t>▸ </a:t>
+            </a:r>
+            <a:r>
+              <a:rPr sz="1600">
+                <a:solidFill>
+                  <a:srgbClr val="202020"/>
+                </a:solidFill>
+              </a:rPr>
+              <a:t>Leakage control: headline config DISABLES the threat feed so labels can't inflate the score.</a:t>
             </a:r>
           </a:p>
         </p:txBody>
       </p:sp>
       <p:graphicFrame>
         <p:nvGraphicFramePr>
-          <p:cNvPr id="5" name="Table 4"/>
+          <p:cNvPr id="6" name="Table 5"/>
           <p:cNvGraphicFramePr>
             <a:graphicFrameLocks noGrp="1"/>
           </p:cNvGraphicFramePr>
           <p:nvPr/>
         </p:nvGraphicFramePr>
         <p:xfrm>
-          <a:off x="640080" y="1280160"/>
-          <a:ext cx="7863840" cy="3108960"/>
+          <a:off x="640080" y="3108960"/>
+          <a:ext cx="7863840" cy="1463040"/>
         </p:xfrm>
         <a:graphic>
           <a:graphicData uri="http://schemas.openxmlformats.org/drawingml/2006/table">
@@ -3998,24 +4507,24 @@
                 <a:tableStyleId>{5C22544A-7EE6-4342-B048-85BDC9FD1C3A}</a:tableStyleId>
               </a:tblPr>
               <a:tblGrid>
-                <a:gridCol w="4297680"/>
-                <a:gridCol w="2468880"/>
+                <a:gridCol w="4480560"/>
+                <a:gridCol w="1188720"/>
+                <a:gridCol w="1097280"/>
                 <a:gridCol w="1097280"/>
               </a:tblGrid>
-              <a:tr h="518160">
+              <a:tr h="487680">
                 <a:tc>
                   <a:txBody>
                     <a:bodyPr/>
                     <a:lstStyle/>
                     <a:p>
-                      <a:pPr algn="l"/>
                       <a:r>
-                        <a:rPr b="1" sz="1400">
+                        <a:rPr b="1" sz="1300">
                           <a:solidFill>
                             <a:srgbClr val="FFFFFF"/>
                           </a:solidFill>
                         </a:rPr>
-                        <a:t>Input</a:t>
+                        <a:t>Configuration</a:t>
                       </a:r>
                     </a:p>
                   </a:txBody>
@@ -4030,14 +4539,13 @@
                     <a:bodyPr/>
                     <a:lstStyle/>
                     <a:p>
-                      <a:pPr algn="l"/>
                       <a:r>
-                        <a:rPr b="1" sz="1400">
+                        <a:rPr b="1" sz="1300">
                           <a:solidFill>
                             <a:srgbClr val="FFFFFF"/>
                           </a:solidFill>
                         </a:rPr>
-                        <a:t>Verdict</a:t>
+                        <a:t>Precision</a:t>
                       </a:r>
                     </a:p>
                   </a:txBody>
@@ -4052,14 +4560,34 @@
                     <a:bodyPr/>
                     <a:lstStyle/>
                     <a:p>
-                      <a:pPr algn="l"/>
                       <a:r>
-                        <a:rPr b="1" sz="1400">
+                        <a:rPr b="1" sz="1300">
                           <a:solidFill>
                             <a:srgbClr val="FFFFFF"/>
                           </a:solidFill>
                         </a:rPr>
-                        <a:t>Score</a:t>
+                        <a:t>Recall</a:t>
+                      </a:r>
+                    </a:p>
+                  </a:txBody>
+                  <a:tcPr>
+                    <a:solidFill>
+                      <a:srgbClr val="2E2E8F"/>
+                    </a:solidFill>
+                  </a:tcPr>
+                </a:tc>
+                <a:tc>
+                  <a:txBody>
+                    <a:bodyPr/>
+                    <a:lstStyle/>
+                    <a:p>
+                      <a:r>
+                        <a:rPr b="1" sz="1300">
+                          <a:solidFill>
+                            <a:srgbClr val="FFFFFF"/>
+                          </a:solidFill>
+                        </a:rPr>
+                        <a:t>F1</a:t>
                       </a:r>
                     </a:p>
                   </a:txBody>
@@ -4070,7 +4598,7 @@
                   </a:tcPr>
                 </a:tc>
               </a:tr>
-              <a:tr h="518160">
+              <a:tr h="487680">
                 <a:tc>
                   <a:txBody>
                     <a:bodyPr/>
@@ -4082,28 +4610,7 @@
                             <a:srgbClr val="202020"/>
                           </a:solidFill>
                         </a:rPr>
-                        <a:t>github.com (live)</a:t>
-                      </a:r>
-                    </a:p>
-                  </a:txBody>
-                  <a:tcPr>
-                    <a:solidFill>
-                      <a:srgbClr val="FFFFFF"/>
-                    </a:solidFill>
-                  </a:tcPr>
-                </a:tc>
-                <a:tc>
-                  <a:txBody>
-                    <a:bodyPr/>
-                    <a:lstStyle/>
-                    <a:p>
-                      <a:r>
-                        <a:rPr sz="1250" b="1">
-                          <a:solidFill>
-                            <a:srgbClr val="15803D"/>
-                          </a:solidFill>
-                        </a:rPr>
-                        <a:t>Likely Safe</a:t>
+                        <a:t>Without threat intel (URL/HTML/domain only)</a:t>
                       </a:r>
                     </a:p>
                   </a:txBody>
@@ -4124,7 +4631,7 @@
                             <a:srgbClr val="202020"/>
                           </a:solidFill>
                         </a:rPr>
-                        <a:t>0</a:t>
+                        <a:t>0.92</a:t>
                       </a:r>
                     </a:p>
                   </a:txBody>
@@ -4134,8 +4641,6 @@
                     </a:solidFill>
                   </a:tcPr>
                 </a:tc>
-              </a:tr>
-              <a:tr h="518160">
                 <a:tc>
                   <a:txBody>
                     <a:bodyPr/>
@@ -4147,13 +4652,13 @@
                             <a:srgbClr val="202020"/>
                           </a:solidFill>
                         </a:rPr>
-                        <a:t>paypal-login.&lt;attacker&gt;.com (page dead)</a:t>
+                        <a:t>0.25</a:t>
                       </a:r>
                     </a:p>
                   </a:txBody>
                   <a:tcPr>
                     <a:solidFill>
-                      <a:srgbClr val="EEEEF6"/>
+                      <a:srgbClr val="FFFFFF"/>
                     </a:solidFill>
                   </a:tcPr>
                 </a:tc>
@@ -4163,12 +4668,35 @@
                     <a:lstStyle/>
                     <a:p>
                       <a:r>
-                        <a:rPr sz="1250" b="1">
+                        <a:rPr sz="1250">
                           <a:solidFill>
-                            <a:srgbClr val="E11D48"/>
+                            <a:srgbClr val="202020"/>
                           </a:solidFill>
                         </a:rPr>
-                        <a:t>High Risk</a:t>
+                        <a:t>0.40</a:t>
+                      </a:r>
+                    </a:p>
+                  </a:txBody>
+                  <a:tcPr>
+                    <a:solidFill>
+                      <a:srgbClr val="FFFFFF"/>
+                    </a:solidFill>
+                  </a:tcPr>
+                </a:tc>
+              </a:tr>
+              <a:tr h="487680">
+                <a:tc>
+                  <a:txBody>
+                    <a:bodyPr/>
+                    <a:lstStyle/>
+                    <a:p>
+                      <a:r>
+                        <a:rPr sz="1250">
+                          <a:solidFill>
+                            <a:srgbClr val="202020"/>
+                          </a:solidFill>
+                        </a:rPr>
+                        <a:t>With threat intel</a:t>
                       </a:r>
                     </a:p>
                   </a:txBody>
@@ -4189,116 +4717,7 @@
                             <a:srgbClr val="202020"/>
                           </a:solidFill>
                         </a:rPr>
-                        <a:t>82</a:t>
-                      </a:r>
-                    </a:p>
-                  </a:txBody>
-                  <a:tcPr>
-                    <a:solidFill>
-                      <a:srgbClr val="EEEEF6"/>
-                    </a:solidFill>
-                  </a:tcPr>
-                </a:tc>
-              </a:tr>
-              <a:tr h="518160">
-                <a:tc>
-                  <a:txBody>
-                    <a:bodyPr/>
-                    <a:lstStyle/>
-                    <a:p>
-                      <a:r>
-                        <a:rPr sz="1250">
-                          <a:solidFill>
-                            <a:srgbClr val="202020"/>
-                          </a:solidFill>
-                        </a:rPr>
-                        <a:t>g00gle-security.com</a:t>
-                      </a:r>
-                    </a:p>
-                  </a:txBody>
-                  <a:tcPr>
-                    <a:solidFill>
-                      <a:srgbClr val="FFFFFF"/>
-                    </a:solidFill>
-                  </a:tcPr>
-                </a:tc>
-                <a:tc>
-                  <a:txBody>
-                    <a:bodyPr/>
-                    <a:lstStyle/>
-                    <a:p>
-                      <a:r>
-                        <a:rPr sz="1250" b="1">
-                          <a:solidFill>
-                            <a:srgbClr val="CA8A04"/>
-                          </a:solidFill>
-                        </a:rPr>
-                        <a:t>Needs Caution+</a:t>
-                      </a:r>
-                    </a:p>
-                  </a:txBody>
-                  <a:tcPr>
-                    <a:solidFill>
-                      <a:srgbClr val="FFFFFF"/>
-                    </a:solidFill>
-                  </a:tcPr>
-                </a:tc>
-                <a:tc>
-                  <a:txBody>
-                    <a:bodyPr/>
-                    <a:lstStyle/>
-                    <a:p>
-                      <a:r>
-                        <a:rPr sz="1250">
-                          <a:solidFill>
-                            <a:srgbClr val="202020"/>
-                          </a:solidFill>
-                        </a:rPr>
-                        <a:t>55+</a:t>
-                      </a:r>
-                    </a:p>
-                  </a:txBody>
-                  <a:tcPr>
-                    <a:solidFill>
-                      <a:srgbClr val="FFFFFF"/>
-                    </a:solidFill>
-                  </a:tcPr>
-                </a:tc>
-              </a:tr>
-              <a:tr h="518160">
-                <a:tc>
-                  <a:txBody>
-                    <a:bodyPr/>
-                    <a:lstStyle/>
-                    <a:p>
-                      <a:r>
-                        <a:rPr sz="1250">
-                          <a:solidFill>
-                            <a:srgbClr val="202020"/>
-                          </a:solidFill>
-                        </a:rPr>
-                        <a:t>Sample phishing page</a:t>
-                      </a:r>
-                    </a:p>
-                  </a:txBody>
-                  <a:tcPr>
-                    <a:solidFill>
-                      <a:srgbClr val="EEEEF6"/>
-                    </a:solidFill>
-                  </a:tcPr>
-                </a:tc>
-                <a:tc>
-                  <a:txBody>
-                    <a:bodyPr/>
-                    <a:lstStyle/>
-                    <a:p>
-                      <a:r>
-                        <a:rPr sz="1250" b="1">
-                          <a:solidFill>
-                            <a:srgbClr val="E11D48"/>
-                          </a:solidFill>
-                        </a:rPr>
-                        <a:t>High Risk</a:t>
+                        <a:t>0.97</a:t>
                       </a:r>
                     </a:p>
                   </a:txBody>
@@ -4319,57 +4738,13 @@
                             <a:srgbClr val="202020"/>
                           </a:solidFill>
                         </a:rPr>
-                        <a:t>80</a:t>
+                        <a:t>0.89</a:t>
                       </a:r>
                     </a:p>
                   </a:txBody>
                   <a:tcPr>
                     <a:solidFill>
                       <a:srgbClr val="EEEEF6"/>
-                    </a:solidFill>
-                  </a:tcPr>
-                </a:tc>
-              </a:tr>
-              <a:tr h="518160">
-                <a:tc>
-                  <a:txBody>
-                    <a:bodyPr/>
-                    <a:lstStyle/>
-                    <a:p>
-                      <a:r>
-                        <a:rPr sz="1250">
-                          <a:solidFill>
-                            <a:srgbClr val="202020"/>
-                          </a:solidFill>
-                        </a:rPr>
-                        <a:t>Sample prompt-injection page</a:t>
-                      </a:r>
-                    </a:p>
-                  </a:txBody>
-                  <a:tcPr>
-                    <a:solidFill>
-                      <a:srgbClr val="FFFFFF"/>
-                    </a:solidFill>
-                  </a:tcPr>
-                </a:tc>
-                <a:tc>
-                  <a:txBody>
-                    <a:bodyPr/>
-                    <a:lstStyle/>
-                    <a:p>
-                      <a:r>
-                        <a:rPr sz="1250" b="1">
-                          <a:solidFill>
-                            <a:srgbClr val="E11D48"/>
-                          </a:solidFill>
-                        </a:rPr>
-                        <a:t>High Risk (high severity)</a:t>
-                      </a:r>
-                    </a:p>
-                  </a:txBody>
-                  <a:tcPr>
-                    <a:solidFill>
-                      <a:srgbClr val="FFFFFF"/>
                     </a:solidFill>
                   </a:tcPr>
                 </a:tc>
@@ -4384,13 +4759,13 @@
                             <a:srgbClr val="202020"/>
                           </a:solidFill>
                         </a:rPr>
-                        <a:t>75</a:t>
+                        <a:t>0.93</a:t>
                       </a:r>
                     </a:p>
                   </a:txBody>
                   <a:tcPr>
                     <a:solidFill>
-                      <a:srgbClr val="FFFFFF"/>
+                      <a:srgbClr val="EEEEF6"/>
                     </a:solidFill>
                   </a:tcPr>
                 </a:tc>
@@ -4401,14 +4776,14 @@
       </p:graphicFrame>
       <p:sp>
         <p:nvSpPr>
-          <p:cNvPr id="6" name="TextBox 5"/>
+          <p:cNvPr id="7" name="TextBox 6"/>
           <p:cNvSpPr txBox="1"/>
           <p:nvPr/>
         </p:nvSpPr>
         <p:spPr>
           <a:xfrm>
-            <a:off x="640080" y="4663440"/>
-            <a:ext cx="7863840" cy="914400"/>
+            <a:off x="640080" y="4754880"/>
+            <a:ext cx="7863840" cy="1097280"/>
           </a:xfrm>
           <a:prstGeom prst="rect">
             <a:avLst/>
@@ -4422,350 +4797,12 @@
           <a:lstStyle/>
           <a:p>
             <a:r>
-              <a:rPr sz="1500" i="1">
+              <a:rPr sz="1300" i="1">
                 <a:solidFill>
                   <a:srgbClr val="555555"/>
                 </a:solidFill>
               </a:rPr>
-              <a:t>Both goals met: phishing is caught even without loading the page (URL-only signals), while legitimate login pages are not flagged.</a:t>
-            </a:r>
-          </a:p>
-        </p:txBody>
-      </p:sp>
-    </p:spTree>
-  </p:cSld>
-  <p:clrMapOvr>
-    <a:masterClrMapping/>
-  </p:clrMapOvr>
-</p:sld>
-</file>
-
-<file path=ppt/slides/slide12.xml><?xml version="1.0" encoding="utf-8"?>
-<p:sld xmlns:a="http://schemas.openxmlformats.org/drawingml/2006/main" xmlns:p="http://schemas.openxmlformats.org/presentationml/2006/main" xmlns:r="http://schemas.openxmlformats.org/officeDocument/2006/relationships">
-  <p:cSld>
-    <p:spTree>
-      <p:nvGrpSpPr>
-        <p:cNvPr id="1" name=""/>
-        <p:cNvGrpSpPr/>
-        <p:nvPr/>
-      </p:nvGrpSpPr>
-      <p:grpSpPr/>
-      <p:sp>
-        <p:nvSpPr>
-          <p:cNvPr id="2" name="Rectangle 1"/>
-          <p:cNvSpPr/>
-          <p:nvPr/>
-        </p:nvSpPr>
-        <p:spPr>
-          <a:xfrm>
-            <a:off x="0" y="0"/>
-            <a:ext cx="9144000" cy="777240"/>
-          </a:xfrm>
-          <a:prstGeom prst="rect">
-            <a:avLst/>
-          </a:prstGeom>
-          <a:solidFill>
-            <a:srgbClr val="2E2E8F"/>
-          </a:solidFill>
-          <a:ln>
-            <a:noFill/>
-          </a:ln>
-        </p:spPr>
-        <p:style>
-          <a:lnRef idx="1">
-            <a:schemeClr val="accent1"/>
-          </a:lnRef>
-          <a:fillRef idx="3">
-            <a:schemeClr val="accent1"/>
-          </a:fillRef>
-          <a:effectRef idx="2">
-            <a:schemeClr val="accent1"/>
-          </a:effectRef>
-          <a:fontRef idx="minor">
-            <a:schemeClr val="lt1"/>
-          </a:fontRef>
-        </p:style>
-        <p:txBody>
-          <a:bodyPr rtlCol="0" anchor="ctr" wrap="square"/>
-          <a:lstStyle/>
-          <a:p>
-            <a:pPr algn="l"/>
-            <a:r>
-              <a:rPr sz="2600" b="1">
-                <a:solidFill>
-                  <a:srgbClr val="FFFFFF"/>
-                </a:solidFill>
-              </a:rPr>
-              <a:t>  9.  Remaining Work</a:t>
-            </a:r>
-          </a:p>
-        </p:txBody>
-      </p:sp>
-      <p:sp>
-        <p:nvSpPr>
-          <p:cNvPr id="3" name="Rectangle 2"/>
-          <p:cNvSpPr/>
-          <p:nvPr/>
-        </p:nvSpPr>
-        <p:spPr>
-          <a:xfrm>
-            <a:off x="0" y="6446520"/>
-            <a:ext cx="9144000" cy="411480"/>
-          </a:xfrm>
-          <a:prstGeom prst="rect">
-            <a:avLst/>
-          </a:prstGeom>
-          <a:solidFill>
-            <a:srgbClr val="2E2E8F"/>
-          </a:solidFill>
-          <a:ln>
-            <a:noFill/>
-          </a:ln>
-        </p:spPr>
-        <p:style>
-          <a:lnRef idx="1">
-            <a:schemeClr val="accent1"/>
-          </a:lnRef>
-          <a:fillRef idx="3">
-            <a:schemeClr val="accent1"/>
-          </a:fillRef>
-          <a:effectRef idx="2">
-            <a:schemeClr val="accent1"/>
-          </a:effectRef>
-          <a:fontRef idx="minor">
-            <a:schemeClr val="lt1"/>
-          </a:fontRef>
-        </p:style>
-        <p:txBody>
-          <a:bodyPr rtlCol="0" anchor="ctr" tIns="25400" bIns="25400"/>
-          <a:lstStyle/>
-          <a:p>
-            <a:pPr algn="l"/>
-            <a:r>
-              <a:rPr sz="1100" b="1">
-                <a:solidFill>
-                  <a:srgbClr val="FFFFFF"/>
-                </a:solidFill>
-              </a:rPr>
-              <a:t>  Department of Computer Science and Engineering</a:t>
-            </a:r>
-          </a:p>
-        </p:txBody>
-      </p:sp>
-      <p:sp>
-        <p:nvSpPr>
-          <p:cNvPr id="4" name="TextBox 3"/>
-          <p:cNvSpPr txBox="1"/>
-          <p:nvPr/>
-        </p:nvSpPr>
-        <p:spPr>
-          <a:xfrm>
-            <a:off x="7680960" y="6464808"/>
-            <a:ext cx="1371600" cy="365760"/>
-          </a:xfrm>
-          <a:prstGeom prst="rect">
-            <a:avLst/>
-          </a:prstGeom>
-          <a:noFill/>
-        </p:spPr>
-        <p:txBody>
-          <a:bodyPr wrap="none">
-            <a:spAutoFit/>
-          </a:bodyPr>
-          <a:lstStyle/>
-          <a:p>
-            <a:pPr algn="r"/>
-            <a:r>
-              <a:rPr sz="1100" b="1">
-                <a:solidFill>
-                  <a:srgbClr val="FFFFFF"/>
-                </a:solidFill>
-              </a:rPr>
-              <a:t>12/ 16</a:t>
-            </a:r>
-          </a:p>
-        </p:txBody>
-      </p:sp>
-      <p:sp>
-        <p:nvSpPr>
-          <p:cNvPr id="5" name="TextBox 4"/>
-          <p:cNvSpPr txBox="1"/>
-          <p:nvPr/>
-        </p:nvSpPr>
-        <p:spPr>
-          <a:xfrm>
-            <a:off x="502920" y="1051560"/>
-            <a:ext cx="8138160" cy="5120640"/>
-          </a:xfrm>
-          <a:prstGeom prst="rect">
-            <a:avLst/>
-          </a:prstGeom>
-          <a:noFill/>
-        </p:spPr>
-        <p:txBody>
-          <a:bodyPr wrap="square">
-            <a:spAutoFit/>
-          </a:bodyPr>
-          <a:lstStyle/>
-          <a:p>
-            <a:pPr algn="l">
-              <a:spcAft>
-                <a:spcPts val="700"/>
-              </a:spcAft>
-            </a:pPr>
-            <a:r>
-              <a:rPr sz="1800" b="1">
-                <a:solidFill>
-                  <a:srgbClr val="2E2E8F"/>
-                </a:solidFill>
-              </a:rPr>
-              <a:t>▸ </a:t>
-            </a:r>
-            <a:r>
-              <a:rPr sz="1800" b="0">
-                <a:solidFill>
-                  <a:srgbClr val="202020"/>
-                </a:solidFill>
-              </a:rPr>
-              <a:t>Activate LLM-based classification (injection-safe prompt already prepared).</a:t>
-            </a:r>
-          </a:p>
-          <a:p>
-            <a:pPr algn="l">
-              <a:spcAft>
-                <a:spcPts val="700"/>
-              </a:spcAft>
-            </a:pPr>
-            <a:r>
-              <a:rPr sz="1800" b="1">
-                <a:solidFill>
-                  <a:srgbClr val="2E2E8F"/>
-                </a:solidFill>
-              </a:rPr>
-              <a:t>▸ </a:t>
-            </a:r>
-            <a:r>
-              <a:rPr sz="1800" b="0">
-                <a:solidFill>
-                  <a:srgbClr val="202020"/>
-                </a:solidFill>
-              </a:rPr>
-              <a:t>Multimodal evidence: screenshot capture + OCR.</a:t>
-            </a:r>
-          </a:p>
-          <a:p>
-            <a:pPr algn="l">
-              <a:spcAft>
-                <a:spcPts val="700"/>
-              </a:spcAft>
-            </a:pPr>
-            <a:r>
-              <a:rPr sz="1800" b="1">
-                <a:solidFill>
-                  <a:srgbClr val="2E2E8F"/>
-                </a:solidFill>
-              </a:rPr>
-              <a:t>▸ </a:t>
-            </a:r>
-            <a:r>
-              <a:rPr sz="1800" b="0">
-                <a:solidFill>
-                  <a:srgbClr val="202020"/>
-                </a:solidFill>
-              </a:rPr>
-              <a:t>Live threat intelligence: PhishTank / OpenPhish / blocklists.</a:t>
-            </a:r>
-          </a:p>
-          <a:p>
-            <a:pPr algn="l">
-              <a:spcAft>
-                <a:spcPts val="700"/>
-              </a:spcAft>
-            </a:pPr>
-            <a:r>
-              <a:rPr sz="1800" b="1">
-                <a:solidFill>
-                  <a:srgbClr val="2E2E8F"/>
-                </a:solidFill>
-              </a:rPr>
-              <a:t>▸ </a:t>
-            </a:r>
-            <a:r>
-              <a:rPr sz="1800" b="0">
-                <a:solidFill>
-                  <a:srgbClr val="202020"/>
-                </a:solidFill>
-              </a:rPr>
-              <a:t>Infrastructure signals: WHOIS / DNS / TLS (e.g. domain age).</a:t>
-            </a:r>
-          </a:p>
-          <a:p>
-            <a:pPr algn="l">
-              <a:spcAft>
-                <a:spcPts val="700"/>
-              </a:spcAft>
-            </a:pPr>
-            <a:r>
-              <a:rPr sz="1800" b="1">
-                <a:solidFill>
-                  <a:srgbClr val="2E2E8F"/>
-                </a:solidFill>
-              </a:rPr>
-              <a:t>▸ </a:t>
-            </a:r>
-            <a:r>
-              <a:rPr sz="1800" b="0">
-                <a:solidFill>
-                  <a:srgbClr val="202020"/>
-                </a:solidFill>
-              </a:rPr>
-              <a:t>Stronger RAG: embeddings + FAISS / Chroma (upgrade from TF-IDF).</a:t>
-            </a:r>
-          </a:p>
-          <a:p>
-            <a:pPr algn="l">
-              <a:spcAft>
-                <a:spcPts val="700"/>
-              </a:spcAft>
-            </a:pPr>
-            <a:r>
-              <a:rPr sz="1800" b="1">
-                <a:solidFill>
-                  <a:srgbClr val="2E2E8F"/>
-                </a:solidFill>
-              </a:rPr>
-              <a:t>▸ </a:t>
-            </a:r>
-            <a:r>
-              <a:rPr sz="1800" b="0">
-                <a:solidFill>
-                  <a:srgbClr val="202020"/>
-                </a:solidFill>
-              </a:rPr>
-              <a:t>Labelled evaluation with full metrics vs. baselines.</a:t>
-            </a:r>
-          </a:p>
-          <a:p>
-            <a:pPr algn="l">
-              <a:spcAft>
-                <a:spcPts val="700"/>
-              </a:spcAft>
-            </a:pPr>
-            <a:r>
-              <a:rPr sz="1800" b="1">
-                <a:solidFill>
-                  <a:srgbClr val="2E2E8F"/>
-                </a:solidFill>
-              </a:rPr>
-              <a:t>▸ </a:t>
-            </a:r>
-            <a:r>
-              <a:rPr sz="1800" b="0">
-                <a:solidFill>
-                  <a:srgbClr val="202020"/>
-                </a:solidFill>
-              </a:rPr>
-              <a:t>Optional browser-extension front-end and deployment.</a:t>
+              <a:t>The low URL-only recall (0.25) is a real limitation, kept visible: structural signals alone are high-precision but miss many phishing pages; the feed does the heavy lifting on recall.</a:t>
             </a:r>
           </a:p>
         </p:txBody>
@@ -4824,17 +4861,17 @@
           </a:fontRef>
         </p:style>
         <p:txBody>
-          <a:bodyPr rtlCol="0" anchor="ctr" wrap="square"/>
-          <a:lstStyle/>
-          <a:p>
-            <a:pPr algn="l"/>
-            <a:r>
-              <a:rPr sz="2600" b="1">
+          <a:bodyPr rtlCol="0" anchor="ctr"/>
+          <a:lstStyle/>
+          <a:p>
+            <a:pPr algn="ctr"/>
+            <a:r>
+              <a:rPr sz="2500" b="1">
                 <a:solidFill>
                   <a:srgbClr val="FFFFFF"/>
                 </a:solidFill>
               </a:rPr>
-              <a:t>  10.  Scope</a:t>
+              <a:t>  11.  Limitations &amp; scoping facts</a:t>
             </a:r>
           </a:p>
         </p:txBody>
@@ -4875,12 +4912,12 @@
           </a:fontRef>
         </p:style>
         <p:txBody>
-          <a:bodyPr rtlCol="0" anchor="ctr" tIns="25400" bIns="25400"/>
-          <a:lstStyle/>
-          <a:p>
-            <a:pPr algn="l"/>
-            <a:r>
-              <a:rPr sz="1100" b="1">
+          <a:bodyPr rtlCol="0" anchor="ctr"/>
+          <a:lstStyle/>
+          <a:p>
+            <a:pPr algn="ctr"/>
+            <a:r>
+              <a:rPr sz="1000" b="1">
                 <a:solidFill>
                   <a:srgbClr val="FFFFFF"/>
                 </a:solidFill>
@@ -4914,12 +4951,12 @@
           <a:p>
             <a:pPr algn="r"/>
             <a:r>
-              <a:rPr sz="1100" b="1">
+              <a:rPr sz="1000" b="1">
                 <a:solidFill>
                   <a:srgbClr val="FFFFFF"/>
                 </a:solidFill>
               </a:rPr>
-              <a:t>13/ 16</a:t>
+              <a:t>13/ 17</a:t>
             </a:r>
           </a:p>
         </p:txBody>
@@ -4932,8 +4969,8 @@
         </p:nvSpPr>
         <p:spPr>
           <a:xfrm>
-            <a:off x="502920" y="1051560"/>
-            <a:ext cx="8138160" cy="5120640"/>
+            <a:off x="502920" y="1005840"/>
+            <a:ext cx="8183879" cy="5212080"/>
           </a:xfrm>
           <a:prstGeom prst="rect">
             <a:avLst/>
@@ -4946,13 +4983,13 @@
           </a:bodyPr>
           <a:lstStyle/>
           <a:p>
-            <a:pPr algn="l">
+            <a:pPr>
               <a:spcAft>
-                <a:spcPts val="700"/>
+                <a:spcPts val="600"/>
               </a:spcAft>
             </a:pPr>
             <a:r>
-              <a:rPr sz="2000" b="1">
+              <a:rPr sz="1700" b="1">
                 <a:solidFill>
                   <a:srgbClr val="2E2E8F"/>
                 </a:solidFill>
@@ -4960,22 +4997,22 @@
               <a:t>▸ </a:t>
             </a:r>
             <a:r>
-              <a:rPr sz="2000" b="0">
+              <a:rPr sz="1700">
                 <a:solidFill>
                   <a:srgbClr val="202020"/>
                 </a:solidFill>
               </a:rPr>
-              <a:t>End users (esp. non-technical): a plain-English safety check before entering credentials.</a:t>
-            </a:r>
-          </a:p>
-          <a:p>
-            <a:pPr algn="l">
+              <a:t>Classifier is a rule engine, NOT a trained ML/LLM model; false positives/negatives expected.</a:t>
+            </a:r>
+          </a:p>
+          <a:p>
+            <a:pPr>
               <a:spcAft>
-                <a:spcPts val="700"/>
+                <a:spcPts val="600"/>
               </a:spcAft>
             </a:pPr>
             <a:r>
-              <a:rPr sz="2000" b="1">
+              <a:rPr sz="1700" b="1">
                 <a:solidFill>
                   <a:srgbClr val="2E2E8F"/>
                 </a:solidFill>
@@ -4983,22 +5020,22 @@
               <a:t>▸ </a:t>
             </a:r>
             <a:r>
-              <a:rPr sz="2000" b="0">
+              <a:rPr sz="1700">
                 <a:solidFill>
                   <a:srgbClr val="202020"/>
                 </a:solidFill>
               </a:rPr>
-              <a:t>Security analysts &amp; educators: transparent, evidence-cited verdicts instead of opaque labels.</a:t>
-            </a:r>
-          </a:p>
-          <a:p>
-            <a:pPr algn="l">
+              <a:t>URL-only recall is low (see evaluation).</a:t>
+            </a:r>
+          </a:p>
+          <a:p>
+            <a:pPr>
               <a:spcAft>
-                <a:spcPts val="700"/>
+                <a:spcPts val="600"/>
               </a:spcAft>
             </a:pPr>
             <a:r>
-              <a:rPr sz="2000" b="1">
+              <a:rPr sz="1700" b="1">
                 <a:solidFill>
                   <a:srgbClr val="2E2E8F"/>
                 </a:solidFill>
@@ -5006,22 +5043,22 @@
               <a:t>▸ </a:t>
             </a:r>
             <a:r>
-              <a:rPr sz="2000" b="0">
+              <a:rPr sz="1700">
                 <a:solidFill>
                   <a:srgbClr val="202020"/>
                 </a:solidFill>
               </a:rPr>
-              <a:t>LLM-security case study: untrusted-content handling and prompt-injection defence.</a:t>
-            </a:r>
-          </a:p>
-          <a:p>
-            <a:pPr algn="l">
+              <a:t>Geo/ASN conflict is inactive by default (needs a local GeoIP DB).</a:t>
+            </a:r>
+          </a:p>
+          <a:p>
+            <a:pPr>
               <a:spcAft>
-                <a:spcPts val="700"/>
+                <a:spcPts val="600"/>
               </a:spcAft>
             </a:pPr>
             <a:r>
-              <a:rPr sz="2000" b="1">
+              <a:rPr sz="1700" b="1">
                 <a:solidFill>
                   <a:srgbClr val="2E2E8F"/>
                 </a:solidFill>
@@ -5029,12 +5066,58 @@
               <a:t>▸ </a:t>
             </a:r>
             <a:r>
-              <a:rPr sz="2000" b="0">
+              <a:rPr sz="1700">
                 <a:solidFill>
                   <a:srgbClr val="202020"/>
                 </a:solidFill>
               </a:rPr>
-              <a:t>Reusable, modular base for further phishing-detection research (multimodal, threat-intel, LLM).</a:t>
+              <a:t>Advanced stages (LLM, embeddings, render, multimodal, dynamic) are off by default and need extra deps.</a:t>
+            </a:r>
+          </a:p>
+          <a:p>
+            <a:pPr>
+              <a:spcAft>
+                <a:spcPts val="600"/>
+              </a:spcAft>
+            </a:pPr>
+            <a:r>
+              <a:rPr sz="1700" b="1">
+                <a:solidFill>
+                  <a:srgbClr val="2E2E8F"/>
+                </a:solidFill>
+              </a:rPr>
+              <a:t>▸ </a:t>
+            </a:r>
+            <a:r>
+              <a:rPr sz="1700">
+                <a:solidFill>
+                  <a:srgbClr val="202020"/>
+                </a:solidFill>
+              </a:rPr>
+              <a:t>Bundled data is DEMO data (sample_html, sample_urls.csv, trusted_domains.json, knowledge_base.json), not scraped; live modes use real sources.</a:t>
+            </a:r>
+          </a:p>
+          <a:p>
+            <a:pPr>
+              <a:spcAft>
+                <a:spcPts val="600"/>
+              </a:spcAft>
+            </a:pPr>
+            <a:r>
+              <a:rPr sz="1700" b="1">
+                <a:solidFill>
+                  <a:srgbClr val="2E2E8F"/>
+                </a:solidFill>
+              </a:rPr>
+              <a:t>▸ </a:t>
+            </a:r>
+            <a:r>
+              <a:rPr sz="1700">
+                <a:solidFill>
+                  <a:srgbClr val="202020"/>
+                </a:solidFill>
+              </a:rPr>
+              <a:t>RAG is real; no accuracy is claimed in-app — the harness measures it separately and honestly.</a:t>
             </a:r>
           </a:p>
         </p:txBody>
@@ -5093,17 +5176,17 @@
           </a:fontRef>
         </p:style>
         <p:txBody>
-          <a:bodyPr rtlCol="0" anchor="ctr" wrap="square"/>
-          <a:lstStyle/>
-          <a:p>
-            <a:pPr algn="l"/>
-            <a:r>
-              <a:rPr sz="2600" b="1">
+          <a:bodyPr rtlCol="0" anchor="ctr"/>
+          <a:lstStyle/>
+          <a:p>
+            <a:pPr algn="ctr"/>
+            <a:r>
+              <a:rPr sz="2500" b="1">
                 <a:solidFill>
                   <a:srgbClr val="FFFFFF"/>
                 </a:solidFill>
               </a:rPr>
-              <a:t>  11.  Conclusion</a:t>
+              <a:t>  12.  Prototype — Sentinel UI</a:t>
             </a:r>
           </a:p>
         </p:txBody>
@@ -5144,12 +5227,12 @@
           </a:fontRef>
         </p:style>
         <p:txBody>
-          <a:bodyPr rtlCol="0" anchor="ctr" tIns="25400" bIns="25400"/>
-          <a:lstStyle/>
-          <a:p>
-            <a:pPr algn="l"/>
-            <a:r>
-              <a:rPr sz="1100" b="1">
+          <a:bodyPr rtlCol="0" anchor="ctr"/>
+          <a:lstStyle/>
+          <a:p>
+            <a:pPr algn="ctr"/>
+            <a:r>
+              <a:rPr sz="1000" b="1">
                 <a:solidFill>
                   <a:srgbClr val="FFFFFF"/>
                 </a:solidFill>
@@ -5183,12 +5266,12 @@
           <a:p>
             <a:pPr algn="r"/>
             <a:r>
-              <a:rPr sz="1100" b="1">
+              <a:rPr sz="1000" b="1">
                 <a:solidFill>
                   <a:srgbClr val="FFFFFF"/>
                 </a:solidFill>
               </a:rPr>
-              <a:t>14/ 16</a:t>
+              <a:t>14/ 17</a:t>
             </a:r>
           </a:p>
         </p:txBody>
@@ -5201,8 +5284,8 @@
         </p:nvSpPr>
         <p:spPr>
           <a:xfrm>
-            <a:off x="502920" y="1051560"/>
-            <a:ext cx="8138160" cy="5120640"/>
+            <a:off x="502920" y="1005840"/>
+            <a:ext cx="8183879" cy="5212080"/>
           </a:xfrm>
           <a:prstGeom prst="rect">
             <a:avLst/>
@@ -5215,13 +5298,13 @@
           </a:bodyPr>
           <a:lstStyle/>
           <a:p>
-            <a:pPr algn="l">
+            <a:pPr>
               <a:spcAft>
-                <a:spcPts val="700"/>
+                <a:spcPts val="600"/>
               </a:spcAft>
             </a:pPr>
             <a:r>
-              <a:rPr sz="2000" b="1">
+              <a:rPr sz="1700" b="1">
                 <a:solidFill>
                   <a:srgbClr val="2E2E8F"/>
                 </a:solidFill>
@@ -5229,22 +5312,22 @@
               <a:t>▸ </a:t>
             </a:r>
             <a:r>
-              <a:rPr sz="2000" b="0">
+              <a:rPr sz="1700">
                 <a:solidFill>
                   <a:srgbClr val="202020"/>
                 </a:solidFill>
               </a:rPr>
-              <a:t>Built a working, evidence-grounded phishing-URL detector with explainable 0–100 scoring.</a:t>
-            </a:r>
-          </a:p>
-          <a:p>
-            <a:pPr algn="l">
+              <a:t>React 'Sentinel' UI: animated risk gauge, per-category score breakdown, URL anatomy, evidence, explanation.</a:t>
+            </a:r>
+          </a:p>
+          <a:p>
+            <a:pPr>
               <a:spcAft>
-                <a:spcPts val="700"/>
+                <a:spcPts val="600"/>
               </a:spcAft>
             </a:pPr>
             <a:r>
-              <a:rPr sz="2000" b="1">
+              <a:rPr sz="1700" b="1">
                 <a:solidFill>
                   <a:srgbClr val="2E2E8F"/>
                 </a:solidFill>
@@ -5252,35 +5335,12 @@
               <a:t>▸ </a:t>
             </a:r>
             <a:r>
-              <a:rPr sz="2000" b="0">
+              <a:rPr sz="1700">
                 <a:solidFill>
                   <a:srgbClr val="202020"/>
                 </a:solidFill>
               </a:rPr>
-              <a:t>Key advance: URL-level brand-impersonation / look-alike detection + transparent, calibrated scoring — fewer misses and fewer false positives.</a:t>
-            </a:r>
-          </a:p>
-          <a:p>
-            <a:pPr algn="l">
-              <a:spcAft>
-                <a:spcPts val="700"/>
-              </a:spcAft>
-            </a:pPr>
-            <a:r>
-              <a:rPr sz="2000" b="1">
-                <a:solidFill>
-                  <a:srgbClr val="2E2E8F"/>
-                </a:solidFill>
-              </a:rPr>
-              <a:t>▸ </a:t>
-            </a:r>
-            <a:r>
-              <a:rPr sz="2000" b="0">
-                <a:solidFill>
-                  <a:srgbClr val="202020"/>
-                </a:solidFill>
-              </a:rPr>
-              <a:t>Foundation complete (≈ 55%); next phase adds LLM reasoning, multimodal evidence, and quantitative evaluation.</a:t>
+              <a:t>Streamlit UI: colour-coded result card, risk vs. safety factors, hidden-instruction check, raw-JSON advanced view.</a:t>
             </a:r>
           </a:p>
         </p:txBody>
@@ -5339,17 +5399,17 @@
           </a:fontRef>
         </p:style>
         <p:txBody>
-          <a:bodyPr rtlCol="0" anchor="ctr" wrap="square"/>
-          <a:lstStyle/>
-          <a:p>
-            <a:pPr algn="l"/>
-            <a:r>
-              <a:rPr sz="2600" b="1">
+          <a:bodyPr rtlCol="0" anchor="ctr"/>
+          <a:lstStyle/>
+          <a:p>
+            <a:pPr algn="ctr"/>
+            <a:r>
+              <a:rPr sz="2500" b="1">
                 <a:solidFill>
                   <a:srgbClr val="FFFFFF"/>
                 </a:solidFill>
               </a:rPr>
-              <a:t>  12.  References</a:t>
+              <a:t>  13.  Conclusion</a:t>
             </a:r>
           </a:p>
         </p:txBody>
@@ -5390,12 +5450,12 @@
           </a:fontRef>
         </p:style>
         <p:txBody>
-          <a:bodyPr rtlCol="0" anchor="ctr" tIns="25400" bIns="25400"/>
-          <a:lstStyle/>
-          <a:p>
-            <a:pPr algn="l"/>
-            <a:r>
-              <a:rPr sz="1100" b="1">
+          <a:bodyPr rtlCol="0" anchor="ctr"/>
+          <a:lstStyle/>
+          <a:p>
+            <a:pPr algn="ctr"/>
+            <a:r>
+              <a:rPr sz="1000" b="1">
                 <a:solidFill>
                   <a:srgbClr val="FFFFFF"/>
                 </a:solidFill>
@@ -5429,12 +5489,12 @@
           <a:p>
             <a:pPr algn="r"/>
             <a:r>
-              <a:rPr sz="1100" b="1">
+              <a:rPr sz="1000" b="1">
                 <a:solidFill>
                   <a:srgbClr val="FFFFFF"/>
                 </a:solidFill>
               </a:rPr>
-              <a:t>15/ 16</a:t>
+              <a:t>15/ 17</a:t>
             </a:r>
           </a:p>
         </p:txBody>
@@ -5448,7 +5508,7 @@
         <p:spPr>
           <a:xfrm>
             <a:off x="502920" y="1005840"/>
-            <a:ext cx="8229600" cy="5212080"/>
+            <a:ext cx="8183879" cy="5212080"/>
           </a:xfrm>
           <a:prstGeom prst="rect">
             <a:avLst/>
@@ -5463,196 +5523,93 @@
           <a:p>
             <a:pPr>
               <a:spcAft>
-                <a:spcPts val="300"/>
+                <a:spcPts val="600"/>
               </a:spcAft>
             </a:pPr>
             <a:r>
-              <a:rPr sz="1200">
+              <a:rPr sz="1700" b="1">
+                <a:solidFill>
+                  <a:srgbClr val="2E2E8F"/>
+                </a:solidFill>
+              </a:rPr>
+              <a:t>▸ </a:t>
+            </a:r>
+            <a:r>
+              <a:rPr sz="1700">
                 <a:solidFill>
                   <a:srgbClr val="202020"/>
                 </a:solidFill>
               </a:rPr>
-              <a:t>[1] T. Koide et al., "Detecting Phishing Sites Using ChatGPT," arXiv:2306.05816, 2023.</a:t>
+              <a:t>Working, evidence-grounded phishing detector with a transparent, per-category 0–100 score.</a:t>
             </a:r>
           </a:p>
           <a:p>
             <a:pPr>
               <a:spcAft>
-                <a:spcPts val="300"/>
+                <a:spcPts val="600"/>
               </a:spcAft>
             </a:pPr>
             <a:r>
-              <a:rPr sz="1200">
+              <a:rPr sz="1700" b="1">
+                <a:solidFill>
+                  <a:srgbClr val="2E2E8F"/>
+                </a:solidFill>
+              </a:rPr>
+              <a:t>▸ </a:t>
+            </a:r>
+            <a:r>
+              <a:rPr sz="1700">
                 <a:solidFill>
                   <a:srgbClr val="202020"/>
                 </a:solidFill>
               </a:rPr>
-              <a:t>[2] F. Rashid et al., "LLMs are One-Shot URL Classifiers and Explainers," arXiv:2409.14306, 2024.</a:t>
+              <a:t>~19 of ~24 planned capabilities implemented (~79%): 11 on by default, 8 available-but-disabled, ~5 genuine future work.</a:t>
             </a:r>
           </a:p>
           <a:p>
             <a:pPr>
               <a:spcAft>
-                <a:spcPts val="300"/>
+                <a:spcPts val="600"/>
               </a:spcAft>
             </a:pPr>
             <a:r>
-              <a:rPr sz="1200">
+              <a:rPr sz="1700" b="1">
+                <a:solidFill>
+                  <a:srgbClr val="2E2E8F"/>
+                </a:solidFill>
+              </a:rPr>
+              <a:t>▸ </a:t>
+            </a:r>
+            <a:r>
+              <a:rPr sz="1700">
                 <a:solidFill>
                   <a:srgbClr val="202020"/>
                 </a:solidFill>
               </a:rPr>
-              <a:t>[3] Y. Li et al., "KnowPhish," arXiv:2403.02253, 2024.</a:t>
+              <a:t>Honest evaluation: high precision; low URL-only recall; the threat feed drives recall.</a:t>
             </a:r>
           </a:p>
           <a:p>
             <a:pPr>
               <a:spcAft>
-                <a:spcPts val="300"/>
+                <a:spcPts val="600"/>
               </a:spcAft>
             </a:pPr>
             <a:r>
-              <a:rPr sz="1200">
+              <a:rPr sz="1700" b="1">
+                <a:solidFill>
+                  <a:srgbClr val="2E2E8F"/>
+                </a:solidFill>
+              </a:rPr>
+              <a:t>▸ </a:t>
+            </a:r>
+            <a:r>
+              <a:rPr sz="1700">
                 <a:solidFill>
                   <a:srgbClr val="202020"/>
                 </a:solidFill>
               </a:rPr>
-              <a:t>[4] J. Lee et al., "Multimodal LLMs for Phishing Webpage Detection," arXiv:2408.05941, 2024.</a:t>
-            </a:r>
-          </a:p>
-          <a:p>
-            <a:pPr>
-              <a:spcAft>
-                <a:spcPts val="300"/>
-              </a:spcAft>
-            </a:pPr>
-            <a:r>
-              <a:rPr sz="1200">
-                <a:solidFill>
-                  <a:srgbClr val="202020"/>
-                </a:solidFill>
-              </a:rPr>
-              <a:t>[5] S. S. Roy, S. Nilizadeh, "PhishLang," arXiv:2408.05667, 2024.</a:t>
-            </a:r>
-          </a:p>
-          <a:p>
-            <a:pPr>
-              <a:spcAft>
-                <a:spcPts val="300"/>
-              </a:spcAft>
-            </a:pPr>
-            <a:r>
-              <a:rPr sz="1200">
-                <a:solidFill>
-                  <a:srgbClr val="202020"/>
-                </a:solidFill>
-              </a:rPr>
-              <a:t>[6] W. Li et al., "PhishDebate," arXiv:2506.15656, 2025.</a:t>
-            </a:r>
-          </a:p>
-          <a:p>
-            <a:pPr>
-              <a:spcAft>
-                <a:spcPts val="300"/>
-              </a:spcAft>
-            </a:pPr>
-            <a:r>
-              <a:rPr sz="1200">
-                <a:solidFill>
-                  <a:srgbClr val="202020"/>
-                </a:solidFill>
-              </a:rPr>
-              <a:t>[7] W. Li et al., "PhishIntentionLLM," arXiv:2507.15419, 2025.</a:t>
-            </a:r>
-          </a:p>
-          <a:p>
-            <a:pPr>
-              <a:spcAft>
-                <a:spcPts val="300"/>
-              </a:spcAft>
-            </a:pPr>
-            <a:r>
-              <a:rPr sz="1200">
-                <a:solidFill>
-                  <a:srgbClr val="202020"/>
-                </a:solidFill>
-              </a:rPr>
-              <a:t>[8] H. Nakano et al., "PhishParrot," arXiv:2508.02035, 2025.</a:t>
-            </a:r>
-          </a:p>
-          <a:p>
-            <a:pPr>
-              <a:spcAft>
-                <a:spcPts val="300"/>
-              </a:spcAft>
-            </a:pPr>
-            <a:r>
-              <a:rPr sz="1200">
-                <a:solidFill>
-                  <a:srgbClr val="202020"/>
-                </a:solidFill>
-              </a:rPr>
-              <a:t>[9] OWASP GenAI, "LLM01:2025 Prompt Injection," 2025.</a:t>
-            </a:r>
-          </a:p>
-          <a:p>
-            <a:pPr>
-              <a:spcAft>
-                <a:spcPts val="300"/>
-              </a:spcAft>
-            </a:pPr>
-            <a:r>
-              <a:rPr sz="1200">
-                <a:solidFill>
-                  <a:srgbClr val="202020"/>
-                </a:solidFill>
-              </a:rPr>
-              <a:t>[10] OWASP GenAI, "LLM08:2025 Vector &amp; Embedding Weaknesses," 2025.</a:t>
-            </a:r>
-          </a:p>
-          <a:p>
-            <a:pPr>
-              <a:spcAft>
-                <a:spcPts val="300"/>
-              </a:spcAft>
-            </a:pPr>
-            <a:r>
-              <a:rPr sz="1200">
-                <a:solidFill>
-                  <a:srgbClr val="202020"/>
-                </a:solidFill>
-              </a:rPr>
-              <a:t>[11] PhishTank, Cisco Talos Intelligence Group.</a:t>
-            </a:r>
-          </a:p>
-          <a:p>
-            <a:pPr>
-              <a:spcAft>
-                <a:spcPts val="300"/>
-              </a:spcAft>
-            </a:pPr>
-            <a:r>
-              <a:rPr sz="1200">
-                <a:solidFill>
-                  <a:srgbClr val="202020"/>
-                </a:solidFill>
-              </a:rPr>
-              <a:t>[12] OpenPhish, "Phishing Intelligence."</a:t>
-            </a:r>
-          </a:p>
-          <a:p>
-            <a:pPr>
-              <a:spcAft>
-                <a:spcPts val="300"/>
-              </a:spcAft>
-            </a:pPr>
-            <a:r>
-              <a:rPr sz="1200">
-                <a:solidFill>
-                  <a:srgbClr val="202020"/>
-                </a:solidFill>
-              </a:rPr>
-              <a:t>[13] P. Maneriker et al., "URLTran," arXiv:2106.05256, 2021.</a:t>
+              <a:t>Next: trained ML classifier, LLM-backed classification, larger labelled evaluation, browser extension.</a:t>
             </a:r>
           </a:p>
         </p:txBody>
@@ -5684,7 +5641,7 @@
         <p:spPr>
           <a:xfrm>
             <a:off x="0" y="0"/>
-            <a:ext cx="9144000" cy="164592"/>
+            <a:ext cx="9144000" cy="777240"/>
           </a:xfrm>
           <a:prstGeom prst="rect">
             <a:avLst/>
@@ -5715,6 +5672,258 @@
           <a:lstStyle/>
           <a:p>
             <a:pPr algn="ctr"/>
+            <a:r>
+              <a:rPr sz="2500" b="1">
+                <a:solidFill>
+                  <a:srgbClr val="FFFFFF"/>
+                </a:solidFill>
+              </a:rPr>
+              <a:t>  14.  References</a:t>
+            </a:r>
+          </a:p>
+        </p:txBody>
+      </p:sp>
+      <p:sp>
+        <p:nvSpPr>
+          <p:cNvPr id="3" name="Rectangle 2"/>
+          <p:cNvSpPr/>
+          <p:nvPr/>
+        </p:nvSpPr>
+        <p:spPr>
+          <a:xfrm>
+            <a:off x="0" y="6446520"/>
+            <a:ext cx="9144000" cy="411480"/>
+          </a:xfrm>
+          <a:prstGeom prst="rect">
+            <a:avLst/>
+          </a:prstGeom>
+          <a:solidFill>
+            <a:srgbClr val="2E2E8F"/>
+          </a:solidFill>
+          <a:ln>
+            <a:noFill/>
+          </a:ln>
+        </p:spPr>
+        <p:style>
+          <a:lnRef idx="1">
+            <a:schemeClr val="accent1"/>
+          </a:lnRef>
+          <a:fillRef idx="3">
+            <a:schemeClr val="accent1"/>
+          </a:fillRef>
+          <a:effectRef idx="2">
+            <a:schemeClr val="accent1"/>
+          </a:effectRef>
+          <a:fontRef idx="minor">
+            <a:schemeClr val="lt1"/>
+          </a:fontRef>
+        </p:style>
+        <p:txBody>
+          <a:bodyPr rtlCol="0" anchor="ctr"/>
+          <a:lstStyle/>
+          <a:p>
+            <a:pPr algn="ctr"/>
+            <a:r>
+              <a:rPr sz="1000" b="1">
+                <a:solidFill>
+                  <a:srgbClr val="FFFFFF"/>
+                </a:solidFill>
+              </a:rPr>
+              <a:t>  Department of Computer Science and Engineering</a:t>
+            </a:r>
+          </a:p>
+        </p:txBody>
+      </p:sp>
+      <p:sp>
+        <p:nvSpPr>
+          <p:cNvPr id="4" name="TextBox 3"/>
+          <p:cNvSpPr txBox="1"/>
+          <p:nvPr/>
+        </p:nvSpPr>
+        <p:spPr>
+          <a:xfrm>
+            <a:off x="7680960" y="6464808"/>
+            <a:ext cx="1371600" cy="365760"/>
+          </a:xfrm>
+          <a:prstGeom prst="rect">
+            <a:avLst/>
+          </a:prstGeom>
+          <a:noFill/>
+        </p:spPr>
+        <p:txBody>
+          <a:bodyPr wrap="none">
+            <a:spAutoFit/>
+          </a:bodyPr>
+          <a:lstStyle/>
+          <a:p>
+            <a:pPr algn="r"/>
+            <a:r>
+              <a:rPr sz="1000" b="1">
+                <a:solidFill>
+                  <a:srgbClr val="FFFFFF"/>
+                </a:solidFill>
+              </a:rPr>
+              <a:t>16/ 17</a:t>
+            </a:r>
+          </a:p>
+        </p:txBody>
+      </p:sp>
+      <p:sp>
+        <p:nvSpPr>
+          <p:cNvPr id="5" name="TextBox 4"/>
+          <p:cNvSpPr txBox="1"/>
+          <p:nvPr/>
+        </p:nvSpPr>
+        <p:spPr>
+          <a:xfrm>
+            <a:off x="502920" y="1005840"/>
+            <a:ext cx="8229600" cy="5120640"/>
+          </a:xfrm>
+          <a:prstGeom prst="rect">
+            <a:avLst/>
+          </a:prstGeom>
+          <a:noFill/>
+        </p:spPr>
+        <p:txBody>
+          <a:bodyPr wrap="square">
+            <a:spAutoFit/>
+          </a:bodyPr>
+          <a:lstStyle/>
+          <a:p>
+            <a:pPr>
+              <a:spcAft>
+                <a:spcPts val="400"/>
+              </a:spcAft>
+            </a:pPr>
+            <a:r>
+              <a:rPr sz="1200">
+                <a:solidFill>
+                  <a:srgbClr val="202020"/>
+                </a:solidFill>
+              </a:rPr>
+              <a:t>[1] T. Koide et al., Detecting Phishing Sites Using ChatGPT, arXiv:2306.05816, 2023.</a:t>
+            </a:r>
+          </a:p>
+          <a:p>
+            <a:pPr>
+              <a:spcAft>
+                <a:spcPts val="400"/>
+              </a:spcAft>
+            </a:pPr>
+            <a:r>
+              <a:rPr sz="1200">
+                <a:solidFill>
+                  <a:srgbClr val="202020"/>
+                </a:solidFill>
+              </a:rPr>
+              <a:t>[2] F. Rashid et al., LLMs are One-Shot URL Classifiers and Explainers, arXiv:2409.14306, 2024.</a:t>
+            </a:r>
+          </a:p>
+          <a:p>
+            <a:pPr>
+              <a:spcAft>
+                <a:spcPts val="400"/>
+              </a:spcAft>
+            </a:pPr>
+            <a:r>
+              <a:rPr sz="1200">
+                <a:solidFill>
+                  <a:srgbClr val="202020"/>
+                </a:solidFill>
+              </a:rPr>
+              <a:t>[3] OWASP GenAI Security Project, LLM01:2025 Prompt Injection, 2025.</a:t>
+            </a:r>
+          </a:p>
+          <a:p>
+            <a:pPr>
+              <a:spcAft>
+                <a:spcPts val="400"/>
+              </a:spcAft>
+            </a:pPr>
+            <a:r>
+              <a:rPr sz="1200">
+                <a:solidFill>
+                  <a:srgbClr val="202020"/>
+                </a:solidFill>
+              </a:rPr>
+              <a:t>[4] PhishTank (Cisco Talos); OpenPhish, Phishing Intelligence.</a:t>
+            </a:r>
+          </a:p>
+          <a:p>
+            <a:pPr>
+              <a:spcAft>
+                <a:spcPts val="400"/>
+              </a:spcAft>
+            </a:pPr>
+            <a:r>
+              <a:rPr sz="1200">
+                <a:solidFill>
+                  <a:srgbClr val="202020"/>
+                </a:solidFill>
+              </a:rPr>
+              <a:t>[5] Tranco: A Research-Oriented Top Sites Ranking (tranco-list.eu).</a:t>
+            </a:r>
+          </a:p>
+        </p:txBody>
+      </p:sp>
+    </p:spTree>
+  </p:cSld>
+  <p:clrMapOvr>
+    <a:masterClrMapping/>
+  </p:clrMapOvr>
+</p:sld>
+</file>
+
+<file path=ppt/slides/slide17.xml><?xml version="1.0" encoding="utf-8"?>
+<p:sld xmlns:a="http://schemas.openxmlformats.org/drawingml/2006/main" xmlns:p="http://schemas.openxmlformats.org/presentationml/2006/main" xmlns:r="http://schemas.openxmlformats.org/officeDocument/2006/relationships">
+  <p:cSld>
+    <p:spTree>
+      <p:nvGrpSpPr>
+        <p:cNvPr id="1" name=""/>
+        <p:cNvGrpSpPr/>
+        <p:nvPr/>
+      </p:nvGrpSpPr>
+      <p:grpSpPr/>
+      <p:sp>
+        <p:nvSpPr>
+          <p:cNvPr id="2" name="Rectangle 1"/>
+          <p:cNvSpPr/>
+          <p:nvPr/>
+        </p:nvSpPr>
+        <p:spPr>
+          <a:xfrm>
+            <a:off x="0" y="0"/>
+            <a:ext cx="9144000" cy="164592"/>
+          </a:xfrm>
+          <a:prstGeom prst="rect">
+            <a:avLst/>
+          </a:prstGeom>
+          <a:solidFill>
+            <a:srgbClr val="2E2E8F"/>
+          </a:solidFill>
+          <a:ln>
+            <a:noFill/>
+          </a:ln>
+        </p:spPr>
+        <p:style>
+          <a:lnRef idx="1">
+            <a:schemeClr val="accent1"/>
+          </a:lnRef>
+          <a:fillRef idx="3">
+            <a:schemeClr val="accent1"/>
+          </a:fillRef>
+          <a:effectRef idx="2">
+            <a:schemeClr val="accent1"/>
+          </a:effectRef>
+          <a:fontRef idx="minor">
+            <a:schemeClr val="lt1"/>
+          </a:fontRef>
+        </p:style>
+        <p:txBody>
+          <a:bodyPr rtlCol="0" anchor="ctr"/>
+          <a:lstStyle/>
+          <a:p>
+            <a:pPr algn="ctr"/>
           </a:p>
         </p:txBody>
       </p:sp>
@@ -5738,7 +5947,6 @@
           <a:ln>
             <a:noFill/>
           </a:ln>
-          <a:effectLst/>
         </p:spPr>
         <p:style>
           <a:lnRef idx="1">
@@ -5806,12 +6014,12 @@
           </a:fontRef>
         </p:style>
         <p:txBody>
-          <a:bodyPr rtlCol="0" anchor="ctr" tIns="25400" bIns="25400"/>
-          <a:lstStyle/>
-          <a:p>
-            <a:pPr algn="l"/>
-            <a:r>
-              <a:rPr sz="1100" b="1">
+          <a:bodyPr rtlCol="0" anchor="ctr"/>
+          <a:lstStyle/>
+          <a:p>
+            <a:pPr algn="ctr"/>
+            <a:r>
+              <a:rPr sz="1000" b="1">
                 <a:solidFill>
                   <a:srgbClr val="FFFFFF"/>
                 </a:solidFill>
@@ -5845,12 +6053,12 @@
           <a:p>
             <a:pPr algn="r"/>
             <a:r>
-              <a:rPr sz="1100" b="1">
+              <a:rPr sz="1000" b="1">
                 <a:solidFill>
                   <a:srgbClr val="FFFFFF"/>
                 </a:solidFill>
               </a:rPr>
-              <a:t>16/ 16</a:t>
+              <a:t>17/ 17</a:t>
             </a:r>
           </a:p>
         </p:txBody>
@@ -5909,12 +6117,12 @@
           </a:fontRef>
         </p:style>
         <p:txBody>
-          <a:bodyPr rtlCol="0" anchor="ctr" wrap="square"/>
-          <a:lstStyle/>
-          <a:p>
-            <a:pPr algn="l"/>
-            <a:r>
-              <a:rPr sz="2600" b="1">
+          <a:bodyPr rtlCol="0" anchor="ctr"/>
+          <a:lstStyle/>
+          <a:p>
+            <a:pPr algn="ctr"/>
+            <a:r>
+              <a:rPr sz="2500" b="1">
                 <a:solidFill>
                   <a:srgbClr val="FFFFFF"/>
                 </a:solidFill>
@@ -5960,12 +6168,12 @@
           </a:fontRef>
         </p:style>
         <p:txBody>
-          <a:bodyPr rtlCol="0" anchor="ctr" tIns="25400" bIns="25400"/>
-          <a:lstStyle/>
-          <a:p>
-            <a:pPr algn="l"/>
-            <a:r>
-              <a:rPr sz="1100" b="1">
+          <a:bodyPr rtlCol="0" anchor="ctr"/>
+          <a:lstStyle/>
+          <a:p>
+            <a:pPr algn="ctr"/>
+            <a:r>
+              <a:rPr sz="1000" b="1">
                 <a:solidFill>
                   <a:srgbClr val="FFFFFF"/>
                 </a:solidFill>
@@ -5999,12 +6207,12 @@
           <a:p>
             <a:pPr algn="r"/>
             <a:r>
-              <a:rPr sz="1100" b="1">
+              <a:rPr sz="1000" b="1">
                 <a:solidFill>
                   <a:srgbClr val="FFFFFF"/>
                 </a:solidFill>
               </a:rPr>
-              <a:t>2/ 16</a:t>
+              <a:t>2/ 17</a:t>
             </a:r>
           </a:p>
         </p:txBody>
@@ -6017,8 +6225,8 @@
         </p:nvSpPr>
         <p:spPr>
           <a:xfrm>
-            <a:off x="731520" y="1097280"/>
-            <a:ext cx="7680960" cy="5120640"/>
+            <a:off x="731520" y="1005840"/>
+            <a:ext cx="7772400" cy="5303520"/>
           </a:xfrm>
           <a:prstGeom prst="rect">
             <a:avLst/>
@@ -6033,11 +6241,11 @@
           <a:p>
             <a:pPr>
               <a:spcAft>
-                <a:spcPts val="600"/>
+                <a:spcPts val="400"/>
               </a:spcAft>
             </a:pPr>
             <a:r>
-              <a:rPr sz="1900" b="1">
+              <a:rPr sz="1600" b="1">
                 <a:solidFill>
                   <a:srgbClr val="2E2E8F"/>
                 </a:solidFill>
@@ -6045,7 +6253,7 @@
               <a:t>1.  </a:t>
             </a:r>
             <a:r>
-              <a:rPr sz="1900">
+              <a:rPr sz="1600">
                 <a:solidFill>
                   <a:srgbClr val="202020"/>
                 </a:solidFill>
@@ -6056,11 +6264,11 @@
           <a:p>
             <a:pPr>
               <a:spcAft>
-                <a:spcPts val="600"/>
+                <a:spcPts val="400"/>
               </a:spcAft>
             </a:pPr>
             <a:r>
-              <a:rPr sz="1900" b="1">
+              <a:rPr sz="1600" b="1">
                 <a:solidFill>
                   <a:srgbClr val="2E2E8F"/>
                 </a:solidFill>
@@ -6068,22 +6276,22 @@
               <a:t>2.  </a:t>
             </a:r>
             <a:r>
-              <a:rPr sz="1900">
+              <a:rPr sz="1600">
                 <a:solidFill>
                   <a:srgbClr val="202020"/>
                 </a:solidFill>
               </a:rPr>
-              <a:t>Literature Survey / Background Theory</a:t>
+              <a:t>Literature Survey</a:t>
             </a:r>
           </a:p>
           <a:p>
             <a:pPr>
               <a:spcAft>
-                <a:spcPts val="600"/>
+                <a:spcPts val="400"/>
               </a:spcAft>
             </a:pPr>
             <a:r>
-              <a:rPr sz="1900" b="1">
+              <a:rPr sz="1600" b="1">
                 <a:solidFill>
                   <a:srgbClr val="2E2E8F"/>
                 </a:solidFill>
@@ -6091,7 +6299,7 @@
               <a:t>3.  </a:t>
             </a:r>
             <a:r>
-              <a:rPr sz="1900">
+              <a:rPr sz="1600">
                 <a:solidFill>
                   <a:srgbClr val="202020"/>
                 </a:solidFill>
@@ -6102,11 +6310,11 @@
           <a:p>
             <a:pPr>
               <a:spcAft>
-                <a:spcPts val="600"/>
+                <a:spcPts val="400"/>
               </a:spcAft>
             </a:pPr>
             <a:r>
-              <a:rPr sz="1900" b="1">
+              <a:rPr sz="1600" b="1">
                 <a:solidFill>
                   <a:srgbClr val="2E2E8F"/>
                 </a:solidFill>
@@ -6114,7 +6322,7 @@
               <a:t>4.  </a:t>
             </a:r>
             <a:r>
-              <a:rPr sz="1900">
+              <a:rPr sz="1600">
                 <a:solidFill>
                   <a:srgbClr val="202020"/>
                 </a:solidFill>
@@ -6125,11 +6333,11 @@
           <a:p>
             <a:pPr>
               <a:spcAft>
-                <a:spcPts val="600"/>
+                <a:spcPts val="400"/>
               </a:spcAft>
             </a:pPr>
             <a:r>
-              <a:rPr sz="1900" b="1">
+              <a:rPr sz="1600" b="1">
                 <a:solidFill>
                   <a:srgbClr val="2E2E8F"/>
                 </a:solidFill>
@@ -6137,7 +6345,7 @@
               <a:t>5.  </a:t>
             </a:r>
             <a:r>
-              <a:rPr sz="1900">
+              <a:rPr sz="1600">
                 <a:solidFill>
                   <a:srgbClr val="202020"/>
                 </a:solidFill>
@@ -6148,11 +6356,11 @@
           <a:p>
             <a:pPr>
               <a:spcAft>
-                <a:spcPts val="600"/>
+                <a:spcPts val="400"/>
               </a:spcAft>
             </a:pPr>
             <a:r>
-              <a:rPr sz="1900" b="1">
+              <a:rPr sz="1600" b="1">
                 <a:solidFill>
                   <a:srgbClr val="2E2E8F"/>
                 </a:solidFill>
@@ -6160,7 +6368,7 @@
               <a:t>6.  </a:t>
             </a:r>
             <a:r>
-              <a:rPr sz="1900">
+              <a:rPr sz="1600">
                 <a:solidFill>
                   <a:srgbClr val="202020"/>
                 </a:solidFill>
@@ -6171,11 +6379,11 @@
           <a:p>
             <a:pPr>
               <a:spcAft>
-                <a:spcPts val="600"/>
+                <a:spcPts val="400"/>
               </a:spcAft>
             </a:pPr>
             <a:r>
-              <a:rPr sz="1900" b="1">
+              <a:rPr sz="1600" b="1">
                 <a:solidFill>
                   <a:srgbClr val="2E2E8F"/>
                 </a:solidFill>
@@ -6183,22 +6391,22 @@
               <a:t>7.  </a:t>
             </a:r>
             <a:r>
-              <a:rPr sz="1900">
+              <a:rPr sz="1600">
                 <a:solidFill>
                   <a:srgbClr val="202020"/>
                 </a:solidFill>
               </a:rPr>
-              <a:t>Work Done So Far</a:t>
+              <a:t>Status: on by default</a:t>
             </a:r>
           </a:p>
           <a:p>
             <a:pPr>
               <a:spcAft>
-                <a:spcPts val="600"/>
+                <a:spcPts val="400"/>
               </a:spcAft>
             </a:pPr>
             <a:r>
-              <a:rPr sz="1900" b="1">
+              <a:rPr sz="1600" b="1">
                 <a:solidFill>
                   <a:srgbClr val="2E2E8F"/>
                 </a:solidFill>
@@ -6206,22 +6414,22 @@
               <a:t>8.  </a:t>
             </a:r>
             <a:r>
-              <a:rPr sz="1900">
+              <a:rPr sz="1600">
                 <a:solidFill>
                   <a:srgbClr val="202020"/>
                 </a:solidFill>
               </a:rPr>
-              <a:t>Prototype &amp; Results</a:t>
+              <a:t>Status: available but disabled</a:t>
             </a:r>
           </a:p>
           <a:p>
             <a:pPr>
               <a:spcAft>
-                <a:spcPts val="600"/>
+                <a:spcPts val="400"/>
               </a:spcAft>
             </a:pPr>
             <a:r>
-              <a:rPr sz="1900" b="1">
+              <a:rPr sz="1600" b="1">
                 <a:solidFill>
                   <a:srgbClr val="2E2E8F"/>
                 </a:solidFill>
@@ -6229,22 +6437,22 @@
               <a:t>9.  </a:t>
             </a:r>
             <a:r>
-              <a:rPr sz="1900">
+              <a:rPr sz="1600">
                 <a:solidFill>
                   <a:srgbClr val="202020"/>
                 </a:solidFill>
               </a:rPr>
-              <a:t>Remaining Work</a:t>
+              <a:t>Genuine future work</a:t>
             </a:r>
           </a:p>
           <a:p>
             <a:pPr>
               <a:spcAft>
-                <a:spcPts val="600"/>
+                <a:spcPts val="400"/>
               </a:spcAft>
             </a:pPr>
             <a:r>
-              <a:rPr sz="1900" b="1">
+              <a:rPr sz="1600" b="1">
                 <a:solidFill>
                   <a:srgbClr val="2E2E8F"/>
                 </a:solidFill>
@@ -6252,22 +6460,22 @@
               <a:t>10.  </a:t>
             </a:r>
             <a:r>
-              <a:rPr sz="1900">
+              <a:rPr sz="1600">
                 <a:solidFill>
                   <a:srgbClr val="202020"/>
                 </a:solidFill>
               </a:rPr>
-              <a:t>Scope</a:t>
+              <a:t>Testing &amp; Evaluation</a:t>
             </a:r>
           </a:p>
           <a:p>
             <a:pPr>
               <a:spcAft>
-                <a:spcPts val="600"/>
+                <a:spcPts val="400"/>
               </a:spcAft>
             </a:pPr>
             <a:r>
-              <a:rPr sz="1900" b="1">
+              <a:rPr sz="1600" b="1">
                 <a:solidFill>
                   <a:srgbClr val="2E2E8F"/>
                 </a:solidFill>
@@ -6275,22 +6483,22 @@
               <a:t>11.  </a:t>
             </a:r>
             <a:r>
-              <a:rPr sz="1900">
+              <a:rPr sz="1600">
                 <a:solidFill>
                   <a:srgbClr val="202020"/>
                 </a:solidFill>
               </a:rPr>
-              <a:t>Conclusion</a:t>
+              <a:t>Limitations &amp; scoping</a:t>
             </a:r>
           </a:p>
           <a:p>
             <a:pPr>
               <a:spcAft>
-                <a:spcPts val="600"/>
+                <a:spcPts val="400"/>
               </a:spcAft>
             </a:pPr>
             <a:r>
-              <a:rPr sz="1900" b="1">
+              <a:rPr sz="1600" b="1">
                 <a:solidFill>
                   <a:srgbClr val="2E2E8F"/>
                 </a:solidFill>
@@ -6298,7 +6506,53 @@
               <a:t>12.  </a:t>
             </a:r>
             <a:r>
-              <a:rPr sz="1900">
+              <a:rPr sz="1600">
+                <a:solidFill>
+                  <a:srgbClr val="202020"/>
+                </a:solidFill>
+              </a:rPr>
+              <a:t>Prototype (Sentinel UI)</a:t>
+            </a:r>
+          </a:p>
+          <a:p>
+            <a:pPr>
+              <a:spcAft>
+                <a:spcPts val="400"/>
+              </a:spcAft>
+            </a:pPr>
+            <a:r>
+              <a:rPr sz="1600" b="1">
+                <a:solidFill>
+                  <a:srgbClr val="2E2E8F"/>
+                </a:solidFill>
+              </a:rPr>
+              <a:t>13.  </a:t>
+            </a:r>
+            <a:r>
+              <a:rPr sz="1600">
+                <a:solidFill>
+                  <a:srgbClr val="202020"/>
+                </a:solidFill>
+              </a:rPr>
+              <a:t>Conclusion</a:t>
+            </a:r>
+          </a:p>
+          <a:p>
+            <a:pPr>
+              <a:spcAft>
+                <a:spcPts val="400"/>
+              </a:spcAft>
+            </a:pPr>
+            <a:r>
+              <a:rPr sz="1600" b="1">
+                <a:solidFill>
+                  <a:srgbClr val="2E2E8F"/>
+                </a:solidFill>
+              </a:rPr>
+              <a:t>14.  </a:t>
+            </a:r>
+            <a:r>
+              <a:rPr sz="1600">
                 <a:solidFill>
                   <a:srgbClr val="202020"/>
                 </a:solidFill>
@@ -6362,12 +6616,12 @@
           </a:fontRef>
         </p:style>
         <p:txBody>
-          <a:bodyPr rtlCol="0" anchor="ctr" wrap="square"/>
-          <a:lstStyle/>
-          <a:p>
-            <a:pPr algn="l"/>
-            <a:r>
-              <a:rPr sz="2600" b="1">
+          <a:bodyPr rtlCol="0" anchor="ctr"/>
+          <a:lstStyle/>
+          <a:p>
+            <a:pPr algn="ctr"/>
+            <a:r>
+              <a:rPr sz="2500" b="1">
                 <a:solidFill>
                   <a:srgbClr val="FFFFFF"/>
                 </a:solidFill>
@@ -6413,12 +6667,12 @@
           </a:fontRef>
         </p:style>
         <p:txBody>
-          <a:bodyPr rtlCol="0" anchor="ctr" tIns="25400" bIns="25400"/>
-          <a:lstStyle/>
-          <a:p>
-            <a:pPr algn="l"/>
-            <a:r>
-              <a:rPr sz="1100" b="1">
+          <a:bodyPr rtlCol="0" anchor="ctr"/>
+          <a:lstStyle/>
+          <a:p>
+            <a:pPr algn="ctr"/>
+            <a:r>
+              <a:rPr sz="1000" b="1">
                 <a:solidFill>
                   <a:srgbClr val="FFFFFF"/>
                 </a:solidFill>
@@ -6452,12 +6706,12 @@
           <a:p>
             <a:pPr algn="r"/>
             <a:r>
-              <a:rPr sz="1100" b="1">
+              <a:rPr sz="1000" b="1">
                 <a:solidFill>
                   <a:srgbClr val="FFFFFF"/>
                 </a:solidFill>
               </a:rPr>
-              <a:t>3/ 16</a:t>
+              <a:t>3/ 17</a:t>
             </a:r>
           </a:p>
         </p:txBody>
@@ -6470,8 +6724,8 @@
         </p:nvSpPr>
         <p:spPr>
           <a:xfrm>
-            <a:off x="502920" y="1051560"/>
-            <a:ext cx="8138160" cy="5120640"/>
+            <a:off x="502920" y="1005840"/>
+            <a:ext cx="8183879" cy="5212080"/>
           </a:xfrm>
           <a:prstGeom prst="rect">
             <a:avLst/>
@@ -6484,13 +6738,13 @@
           </a:bodyPr>
           <a:lstStyle/>
           <a:p>
-            <a:pPr algn="l">
+            <a:pPr>
               <a:spcAft>
-                <a:spcPts val="700"/>
+                <a:spcPts val="600"/>
               </a:spcAft>
             </a:pPr>
             <a:r>
-              <a:rPr sz="2000" b="1">
+              <a:rPr sz="1700" b="1">
                 <a:solidFill>
                   <a:srgbClr val="2E2E8F"/>
                 </a:solidFill>
@@ -6498,22 +6752,22 @@
               <a:t>▸ </a:t>
             </a:r>
             <a:r>
-              <a:rPr sz="2000" b="0">
+              <a:rPr sz="1700">
                 <a:solidFill>
                   <a:srgbClr val="202020"/>
                 </a:solidFill>
               </a:rPr>
-              <a:t>Phishing sites steal credentials, banking &amp; payment data via spoofed and look-alike domains and brand impersonation.</a:t>
-            </a:r>
-          </a:p>
-          <a:p>
-            <a:pPr algn="l">
+              <a:t>Phishing sites steal credentials via spoofed / look-alike domains and brand impersonation; new sites appear and disappear faster than blocklists update.</a:t>
+            </a:r>
+          </a:p>
+          <a:p>
+            <a:pPr>
               <a:spcAft>
-                <a:spcPts val="700"/>
+                <a:spcPts val="600"/>
               </a:spcAft>
             </a:pPr>
             <a:r>
-              <a:rPr sz="2000" b="1">
+              <a:rPr sz="1700" b="1">
                 <a:solidFill>
                   <a:srgbClr val="2E2E8F"/>
                 </a:solidFill>
@@ -6521,22 +6775,22 @@
               <a:t>▸ </a:t>
             </a:r>
             <a:r>
-              <a:rPr sz="2000" b="0">
+              <a:rPr sz="1700">
                 <a:solidFill>
                   <a:srgbClr val="202020"/>
                 </a:solidFill>
               </a:rPr>
-              <a:t>Traditional defences (blocklists, ML on static datasets) miss new, cloaked, fast-changing pages.</a:t>
-            </a:r>
-          </a:p>
-          <a:p>
-            <a:pPr algn="l">
+              <a:t>This system gives an evidence-grounded verdict (Likely Safe / Needs Caution / High Risk) with a transparent 0–100 score, a per-category breakdown, and a plain-English explanation.</a:t>
+            </a:r>
+          </a:p>
+          <a:p>
+            <a:pPr>
               <a:spcAft>
-                <a:spcPts val="700"/>
+                <a:spcPts val="600"/>
               </a:spcAft>
             </a:pPr>
             <a:r>
-              <a:rPr sz="2000" b="1">
+              <a:rPr sz="1700" b="1">
                 <a:solidFill>
                   <a:srgbClr val="2E2E8F"/>
                 </a:solidFill>
@@ -6544,58 +6798,35 @@
               <a:t>▸ </a:t>
             </a:r>
             <a:r>
-              <a:rPr sz="2000" b="0">
+              <a:rPr sz="1700">
                 <a:solidFill>
                   <a:srgbClr val="202020"/>
                 </a:solidFill>
               </a:rPr>
-              <a:t>LLMs + Retrieval-Augmented Generation (RAG) can reason over richer evidence and explain decisions...</a:t>
-            </a:r>
-          </a:p>
-          <a:p>
-            <a:pPr lvl="1" algn="l">
+              <a:t>Signals combine URL analysis, page content, prompt-injection checks, RAG, and external threat- &amp; domain-intelligence.</a:t>
+            </a:r>
+          </a:p>
+          <a:p>
+            <a:pPr>
               <a:spcAft>
-                <a:spcPts val="400"/>
+                <a:spcPts val="600"/>
               </a:spcAft>
             </a:pPr>
             <a:r>
-              <a:rPr sz="1600" b="1">
-                <a:solidFill>
-                  <a:srgbClr val="555555"/>
-                </a:solidFill>
-              </a:rPr>
-              <a:t>– </a:t>
-            </a:r>
-            <a:r>
-              <a:rPr sz="1600">
+              <a:rPr sz="1700" b="1">
+                <a:solidFill>
+                  <a:srgbClr val="2E2E8F"/>
+                </a:solidFill>
+              </a:rPr>
+              <a:t>▸ </a:t>
+            </a:r>
+            <a:r>
+              <a:rPr sz="1700">
                 <a:solidFill>
                   <a:srgbClr val="202020"/>
                 </a:solidFill>
               </a:rPr>
-              <a:t>...but must be grounded in trusted evidence and protected from prompt injection in attacker-controlled content.</a:t>
-            </a:r>
-          </a:p>
-          <a:p>
-            <a:pPr algn="l">
-              <a:spcAft>
-                <a:spcPts val="700"/>
-              </a:spcAft>
-            </a:pPr>
-            <a:r>
-              <a:rPr sz="2000" b="1">
-                <a:solidFill>
-                  <a:srgbClr val="2E2E8F"/>
-                </a:solidFill>
-              </a:rPr>
-              <a:t>▸ </a:t>
-            </a:r>
-            <a:r>
-              <a:rPr sz="2000" b="0">
-                <a:solidFill>
-                  <a:srgbClr val="202020"/>
-                </a:solidFill>
-              </a:rPr>
-              <a:t>This project: an evidence-grounded detector that labels a URL Likely Safe / Needs Caution / High Risk, with a transparent 0–100 score and an explanation.</a:t>
+              <a:t>Scoping fact (stated up front): the classifier is a TRANSPARENT RULE ENGINE, not a trained ML/LLM model. RAG is real. No accuracy is claimed in-app; a separate harness measures it honestly.</a:t>
             </a:r>
           </a:p>
         </p:txBody>
@@ -6654,12 +6885,12 @@
           </a:fontRef>
         </p:style>
         <p:txBody>
-          <a:bodyPr rtlCol="0" anchor="ctr" wrap="square"/>
-          <a:lstStyle/>
-          <a:p>
-            <a:pPr algn="l"/>
-            <a:r>
-              <a:rPr sz="2600" b="1">
+          <a:bodyPr rtlCol="0" anchor="ctr"/>
+          <a:lstStyle/>
+          <a:p>
+            <a:pPr algn="ctr"/>
+            <a:r>
+              <a:rPr sz="2500" b="1">
                 <a:solidFill>
                   <a:srgbClr val="FFFFFF"/>
                 </a:solidFill>
@@ -6705,12 +6936,12 @@
           </a:fontRef>
         </p:style>
         <p:txBody>
-          <a:bodyPr rtlCol="0" anchor="ctr" tIns="25400" bIns="25400"/>
-          <a:lstStyle/>
-          <a:p>
-            <a:pPr algn="l"/>
-            <a:r>
-              <a:rPr sz="1100" b="1">
+          <a:bodyPr rtlCol="0" anchor="ctr"/>
+          <a:lstStyle/>
+          <a:p>
+            <a:pPr algn="ctr"/>
+            <a:r>
+              <a:rPr sz="1000" b="1">
                 <a:solidFill>
                   <a:srgbClr val="FFFFFF"/>
                 </a:solidFill>
@@ -6744,12 +6975,12 @@
           <a:p>
             <a:pPr algn="r"/>
             <a:r>
-              <a:rPr sz="1100" b="1">
+              <a:rPr sz="1000" b="1">
                 <a:solidFill>
                   <a:srgbClr val="FFFFFF"/>
                 </a:solidFill>
               </a:rPr>
-              <a:t>4/ 16</a:t>
+              <a:t>4/ 17</a:t>
             </a:r>
           </a:p>
         </p:txBody>
@@ -6762,8 +6993,8 @@
         </p:nvSpPr>
         <p:spPr>
           <a:xfrm>
-            <a:off x="502920" y="1051560"/>
-            <a:ext cx="8138160" cy="5120640"/>
+            <a:off x="502920" y="1005840"/>
+            <a:ext cx="8183879" cy="5212080"/>
           </a:xfrm>
           <a:prstGeom prst="rect">
             <a:avLst/>
@@ -6776,13 +7007,13 @@
           </a:bodyPr>
           <a:lstStyle/>
           <a:p>
-            <a:pPr algn="l">
+            <a:pPr>
               <a:spcAft>
-                <a:spcPts val="700"/>
+                <a:spcPts val="600"/>
               </a:spcAft>
             </a:pPr>
             <a:r>
-              <a:rPr sz="1800" b="1">
+              <a:rPr sz="1600" b="1">
                 <a:solidFill>
                   <a:srgbClr val="2E2E8F"/>
                 </a:solidFill>
@@ -6790,22 +7021,22 @@
               <a:t>▸ </a:t>
             </a:r>
             <a:r>
-              <a:rPr sz="1800" b="0">
+              <a:rPr sz="1600">
                 <a:solidFill>
                   <a:srgbClr val="202020"/>
                 </a:solidFill>
               </a:rPr>
-              <a:t>URL transformers — URLTran [13]: better than lexical/ML, but URL-only.</a:t>
-            </a:r>
-          </a:p>
-          <a:p>
-            <a:pPr algn="l">
+              <a:t>URL transformers — URLTran: better than lexical/ML, but URL-only.</a:t>
+            </a:r>
+          </a:p>
+          <a:p>
+            <a:pPr>
               <a:spcAft>
-                <a:spcPts val="700"/>
+                <a:spcPts val="600"/>
               </a:spcAft>
             </a:pPr>
             <a:r>
-              <a:rPr sz="1800" b="1">
+              <a:rPr sz="1600" b="1">
                 <a:solidFill>
                   <a:srgbClr val="2E2E8F"/>
                 </a:solidFill>
@@ -6813,22 +7044,22 @@
               <a:t>▸ </a:t>
             </a:r>
             <a:r>
-              <a:rPr sz="1800" b="0">
+              <a:rPr sz="1600">
                 <a:solidFill>
                   <a:srgbClr val="202020"/>
                 </a:solidFill>
               </a:rPr>
-              <a:t>LLM-based — phishing detection with ChatGPT [1]; LLMs as one-shot URL classifiers &amp; explainers [2].</a:t>
-            </a:r>
-          </a:p>
-          <a:p>
-            <a:pPr algn="l">
+              <a:t>LLM-based — ChatGPT phishing detection; LLMs as one-shot URL classifiers &amp; explainers.</a:t>
+            </a:r>
+          </a:p>
+          <a:p>
+            <a:pPr>
               <a:spcAft>
-                <a:spcPts val="700"/>
+                <a:spcPts val="600"/>
               </a:spcAft>
             </a:pPr>
             <a:r>
-              <a:rPr sz="1800" b="1">
+              <a:rPr sz="1600" b="1">
                 <a:solidFill>
                   <a:srgbClr val="2E2E8F"/>
                 </a:solidFill>
@@ -6836,22 +7067,22 @@
               <a:t>▸ </a:t>
             </a:r>
             <a:r>
-              <a:rPr sz="1800" b="0">
+              <a:rPr sz="1600">
                 <a:solidFill>
                   <a:srgbClr val="202020"/>
                 </a:solidFill>
               </a:rPr>
-              <a:t>Multimodal / reference-based — KnowPhish [3]; Multimodal LLMs for webpage detection [4].</a:t>
-            </a:r>
-          </a:p>
-          <a:p>
-            <a:pPr algn="l">
+              <a:t>Multimodal / reference-based — KnowPhish; multimodal LLMs over screenshots.</a:t>
+            </a:r>
+          </a:p>
+          <a:p>
+            <a:pPr>
               <a:spcAft>
-                <a:spcPts val="700"/>
+                <a:spcPts val="600"/>
               </a:spcAft>
             </a:pPr>
             <a:r>
-              <a:rPr sz="1800" b="1">
+              <a:rPr sz="1600" b="1">
                 <a:solidFill>
                   <a:srgbClr val="2E2E8F"/>
                 </a:solidFill>
@@ -6859,22 +7090,22 @@
               <a:t>▸ </a:t>
             </a:r>
             <a:r>
-              <a:rPr sz="1800" b="0">
+              <a:rPr sz="1600">
                 <a:solidFill>
                   <a:srgbClr val="202020"/>
                 </a:solidFill>
               </a:rPr>
-              <a:t>Lightweight / client-side — PhishLang (MobileBERT) [5].</a:t>
-            </a:r>
-          </a:p>
-          <a:p>
-            <a:pPr algn="l">
+              <a:t>Multi-agent &amp; RAG — PhishDebate, PhishIntentionLLM; adaptive crawling (PhishParrot).</a:t>
+            </a:r>
+          </a:p>
+          <a:p>
+            <a:pPr>
               <a:spcAft>
-                <a:spcPts val="700"/>
+                <a:spcPts val="600"/>
               </a:spcAft>
             </a:pPr>
             <a:r>
-              <a:rPr sz="1800" b="1">
+              <a:rPr sz="1600" b="1">
                 <a:solidFill>
                   <a:srgbClr val="2E2E8F"/>
                 </a:solidFill>
@@ -6882,22 +7113,22 @@
               <a:t>▸ </a:t>
             </a:r>
             <a:r>
-              <a:rPr sz="1800" b="0">
+              <a:rPr sz="1600">
                 <a:solidFill>
                   <a:srgbClr val="202020"/>
                 </a:solidFill>
               </a:rPr>
-              <a:t>Multi-agent &amp; RAG — PhishDebate [6], PhishIntentionLLM [7], PhishParrot (adaptive crawling) [8].</a:t>
-            </a:r>
-          </a:p>
-          <a:p>
-            <a:pPr algn="l">
+              <a:t>Security — OWASP LLM01 Prompt Injection, LLM08 embedding weaknesses; feeds: PhishTank, OpenPhish.</a:t>
+            </a:r>
+          </a:p>
+          <a:p>
+            <a:pPr>
               <a:spcAft>
-                <a:spcPts val="700"/>
+                <a:spcPts val="600"/>
               </a:spcAft>
             </a:pPr>
             <a:r>
-              <a:rPr sz="1800" b="1">
+              <a:rPr sz="1600" b="1">
                 <a:solidFill>
                   <a:srgbClr val="2E2E8F"/>
                 </a:solidFill>
@@ -6905,30 +7136,7 @@
               <a:t>▸ </a:t>
             </a:r>
             <a:r>
-              <a:rPr sz="1800" b="0">
-                <a:solidFill>
-                  <a:srgbClr val="202020"/>
-                </a:solidFill>
-              </a:rPr>
-              <a:t>Security — OWASP LLM01 Prompt Injection [9], LLM08 Embedding Weaknesses [10]; feeds: PhishTank [11], OpenPhish [12].</a:t>
-            </a:r>
-          </a:p>
-          <a:p>
-            <a:pPr algn="l">
-              <a:spcAft>
-                <a:spcPts val="700"/>
-              </a:spcAft>
-            </a:pPr>
-            <a:r>
-              <a:rPr sz="1800" b="1">
-                <a:solidFill>
-                  <a:srgbClr val="2E2E8F"/>
-                </a:solidFill>
-              </a:rPr>
-              <a:t>▸ </a:t>
-            </a:r>
-            <a:r>
-              <a:rPr sz="1800" b="0">
+              <a:rPr sz="1600">
                 <a:solidFill>
                   <a:srgbClr val="202020"/>
                 </a:solidFill>
@@ -6992,12 +7200,12 @@
           </a:fontRef>
         </p:style>
         <p:txBody>
-          <a:bodyPr rtlCol="0" anchor="ctr" wrap="square"/>
-          <a:lstStyle/>
-          <a:p>
-            <a:pPr algn="l"/>
-            <a:r>
-              <a:rPr sz="2600" b="1">
+          <a:bodyPr rtlCol="0" anchor="ctr"/>
+          <a:lstStyle/>
+          <a:p>
+            <a:pPr algn="ctr"/>
+            <a:r>
+              <a:rPr sz="2500" b="1">
                 <a:solidFill>
                   <a:srgbClr val="FFFFFF"/>
                 </a:solidFill>
@@ -7043,12 +7251,12 @@
           </a:fontRef>
         </p:style>
         <p:txBody>
-          <a:bodyPr rtlCol="0" anchor="ctr" tIns="25400" bIns="25400"/>
-          <a:lstStyle/>
-          <a:p>
-            <a:pPr algn="l"/>
-            <a:r>
-              <a:rPr sz="1100" b="1">
+          <a:bodyPr rtlCol="0" anchor="ctr"/>
+          <a:lstStyle/>
+          <a:p>
+            <a:pPr algn="ctr"/>
+            <a:r>
+              <a:rPr sz="1000" b="1">
                 <a:solidFill>
                   <a:srgbClr val="FFFFFF"/>
                 </a:solidFill>
@@ -7082,12 +7290,12 @@
           <a:p>
             <a:pPr algn="r"/>
             <a:r>
-              <a:rPr sz="1100" b="1">
+              <a:rPr sz="1000" b="1">
                 <a:solidFill>
                   <a:srgbClr val="FFFFFF"/>
                 </a:solidFill>
               </a:rPr>
-              <a:t>5/ 16</a:t>
+              <a:t>5/ 17</a:t>
             </a:r>
           </a:p>
         </p:txBody>
@@ -7100,8 +7308,8 @@
         </p:nvSpPr>
         <p:spPr>
           <a:xfrm>
-            <a:off x="502920" y="1051560"/>
-            <a:ext cx="8138160" cy="5120640"/>
+            <a:off x="502920" y="1005840"/>
+            <a:ext cx="8183879" cy="5212080"/>
           </a:xfrm>
           <a:prstGeom prst="rect">
             <a:avLst/>
@@ -7114,13 +7322,13 @@
           </a:bodyPr>
           <a:lstStyle/>
           <a:p>
-            <a:pPr algn="l">
+            <a:pPr>
               <a:spcAft>
-                <a:spcPts val="700"/>
+                <a:spcPts val="600"/>
               </a:spcAft>
             </a:pPr>
             <a:r>
-              <a:rPr sz="2000" b="1">
+              <a:rPr sz="1700" b="1">
                 <a:solidFill>
                   <a:srgbClr val="2E2E8F"/>
                 </a:solidFill>
@@ -7128,45 +7336,45 @@
               <a:t>▸ </a:t>
             </a:r>
             <a:r>
-              <a:rPr sz="2000" b="0">
+              <a:rPr sz="1700">
                 <a:solidFill>
                   <a:srgbClr val="202020"/>
                 </a:solidFill>
               </a:rPr>
-              <a:t>Given a URL: classify (Benign / Suspicious / Phishing), assign a 0–100 risk score, and give an evidence-grounded explanation — while safely handling untrusted page content.</a:t>
-            </a:r>
-          </a:p>
-          <a:p>
-            <a:pPr algn="l">
+              <a:t>Given a URL: classify it, assign a transparent 0–100 risk score, and give an evidence-grounded explanation — while safely handling untrusted page content.</a:t>
+            </a:r>
+          </a:p>
+          <a:p>
+            <a:pPr lvl="1">
               <a:spcAft>
-                <a:spcPts val="700"/>
+                <a:spcPts val="300"/>
               </a:spcAft>
             </a:pPr>
             <a:r>
-              <a:rPr sz="2000" b="1">
-                <a:solidFill>
-                  <a:srgbClr val="2E2E8F"/>
-                </a:solidFill>
-              </a:rPr>
-              <a:t>▸ </a:t>
-            </a:r>
-            <a:r>
-              <a:rPr sz="2000" b="0">
+              <a:rPr sz="1400" b="1">
+                <a:solidFill>
+                  <a:srgbClr val="555555"/>
+                </a:solidFill>
+              </a:rPr>
+              <a:t>– </a:t>
+            </a:r>
+            <a:r>
+              <a:rPr sz="1400">
                 <a:solidFill>
                   <a:srgbClr val="202020"/>
                 </a:solidFill>
               </a:rPr>
-              <a:t>Key challenges:</a:t>
-            </a:r>
-          </a:p>
-          <a:p>
-            <a:pPr lvl="1" algn="l">
+              <a:t>Catch phishing missed by URL-only methods (look-alikes, brand-in-host) — even when the page will not load.</a:t>
+            </a:r>
+          </a:p>
+          <a:p>
+            <a:pPr lvl="1">
               <a:spcAft>
-                <a:spcPts val="400"/>
+                <a:spcPts val="300"/>
               </a:spcAft>
             </a:pPr>
             <a:r>
-              <a:rPr sz="1600" b="1">
+              <a:rPr sz="1400" b="1">
                 <a:solidFill>
                   <a:srgbClr val="555555"/>
                 </a:solidFill>
@@ -7174,22 +7382,22 @@
               <a:t>– </a:t>
             </a:r>
             <a:r>
-              <a:rPr sz="1600">
+              <a:rPr sz="1400">
                 <a:solidFill>
                   <a:srgbClr val="202020"/>
                 </a:solidFill>
               </a:rPr>
-              <a:t>Catch phishing missed by URL-only methods (look-alikes, brand-in-host) — even when the page will not load.</a:t>
-            </a:r>
-          </a:p>
-          <a:p>
-            <a:pPr lvl="1" algn="l">
+              <a:t>Avoid false positives on legitimate sites with 'login/account/payment' wording.</a:t>
+            </a:r>
+          </a:p>
+          <a:p>
+            <a:pPr lvl="1">
               <a:spcAft>
-                <a:spcPts val="400"/>
+                <a:spcPts val="300"/>
               </a:spcAft>
             </a:pPr>
             <a:r>
-              <a:rPr sz="1600" b="1">
+              <a:rPr sz="1400" b="1">
                 <a:solidFill>
                   <a:srgbClr val="555555"/>
                 </a:solidFill>
@@ -7197,22 +7405,22 @@
               <a:t>– </a:t>
             </a:r>
             <a:r>
-              <a:rPr sz="1600">
+              <a:rPr sz="1400">
                 <a:solidFill>
                   <a:srgbClr val="202020"/>
                 </a:solidFill>
               </a:rPr>
-              <a:t>Avoid false positives on legitimate sites that use words like 'login', 'account', 'payment'.</a:t>
-            </a:r>
-          </a:p>
-          <a:p>
-            <a:pPr lvl="1" algn="l">
+              <a:t>Make the score interpretable, not arbitrary.</a:t>
+            </a:r>
+          </a:p>
+          <a:p>
+            <a:pPr lvl="1">
               <a:spcAft>
-                <a:spcPts val="400"/>
+                <a:spcPts val="300"/>
               </a:spcAft>
             </a:pPr>
             <a:r>
-              <a:rPr sz="1600" b="1">
+              <a:rPr sz="1400" b="1">
                 <a:solidFill>
                   <a:srgbClr val="555555"/>
                 </a:solidFill>
@@ -7220,35 +7428,12 @@
               <a:t>– </a:t>
             </a:r>
             <a:r>
-              <a:rPr sz="1600">
+              <a:rPr sz="1400">
                 <a:solidFill>
                   <a:srgbClr val="202020"/>
                 </a:solidFill>
               </a:rPr>
-              <a:t>Make the score interpretable, not arbitrary.</a:t>
-            </a:r>
-          </a:p>
-          <a:p>
-            <a:pPr lvl="1" algn="l">
-              <a:spcAft>
-                <a:spcPts val="400"/>
-              </a:spcAft>
-            </a:pPr>
-            <a:r>
-              <a:rPr sz="1600" b="1">
-                <a:solidFill>
-                  <a:srgbClr val="555555"/>
-                </a:solidFill>
-              </a:rPr>
-              <a:t>– </a:t>
-            </a:r>
-            <a:r>
-              <a:rPr sz="1600">
-                <a:solidFill>
-                  <a:srgbClr val="202020"/>
-                </a:solidFill>
-              </a:rPr>
-              <a:t>Treat page text as untrusted — detect hidden instructions, never obey them.</a:t>
+              <a:t>Treat page text (and OCR text) as untrusted — detect hidden instructions, never obey them.</a:t>
             </a:r>
           </a:p>
         </p:txBody>
@@ -7307,12 +7492,12 @@
           </a:fontRef>
         </p:style>
         <p:txBody>
-          <a:bodyPr rtlCol="0" anchor="ctr" wrap="square"/>
-          <a:lstStyle/>
-          <a:p>
-            <a:pPr algn="l"/>
-            <a:r>
-              <a:rPr sz="2600" b="1">
+          <a:bodyPr rtlCol="0" anchor="ctr"/>
+          <a:lstStyle/>
+          <a:p>
+            <a:pPr algn="ctr"/>
+            <a:r>
+              <a:rPr sz="2500" b="1">
                 <a:solidFill>
                   <a:srgbClr val="FFFFFF"/>
                 </a:solidFill>
@@ -7358,12 +7543,12 @@
           </a:fontRef>
         </p:style>
         <p:txBody>
-          <a:bodyPr rtlCol="0" anchor="ctr" tIns="25400" bIns="25400"/>
-          <a:lstStyle/>
-          <a:p>
-            <a:pPr algn="l"/>
-            <a:r>
-              <a:rPr sz="1100" b="1">
+          <a:bodyPr rtlCol="0" anchor="ctr"/>
+          <a:lstStyle/>
+          <a:p>
+            <a:pPr algn="ctr"/>
+            <a:r>
+              <a:rPr sz="1000" b="1">
                 <a:solidFill>
                   <a:srgbClr val="FFFFFF"/>
                 </a:solidFill>
@@ -7397,12 +7582,12 @@
           <a:p>
             <a:pPr algn="r"/>
             <a:r>
-              <a:rPr sz="1100" b="1">
+              <a:rPr sz="1000" b="1">
                 <a:solidFill>
                   <a:srgbClr val="FFFFFF"/>
                 </a:solidFill>
               </a:rPr>
-              <a:t>6/ 16</a:t>
+              <a:t>6/ 17</a:t>
             </a:r>
           </a:p>
         </p:txBody>
@@ -7415,8 +7600,8 @@
         </p:nvSpPr>
         <p:spPr>
           <a:xfrm>
-            <a:off x="502920" y="1051560"/>
-            <a:ext cx="8138160" cy="5120640"/>
+            <a:off x="502920" y="1005840"/>
+            <a:ext cx="8183879" cy="5212080"/>
           </a:xfrm>
           <a:prstGeom prst="rect">
             <a:avLst/>
@@ -7429,13 +7614,13 @@
           </a:bodyPr>
           <a:lstStyle/>
           <a:p>
-            <a:pPr algn="l">
+            <a:pPr>
               <a:spcAft>
-                <a:spcPts val="700"/>
+                <a:spcPts val="600"/>
               </a:spcAft>
             </a:pPr>
             <a:r>
-              <a:rPr sz="2000" b="1">
+              <a:rPr sz="1700" b="1">
                 <a:solidFill>
                   <a:srgbClr val="2E2E8F"/>
                 </a:solidFill>
@@ -7443,22 +7628,22 @@
               <a:t>▸ </a:t>
             </a:r>
             <a:r>
-              <a:rPr sz="2000" b="0">
+              <a:rPr sz="1700">
                 <a:solidFill>
                   <a:srgbClr val="202020"/>
                 </a:solidFill>
               </a:rPr>
-              <a:t>Study ML / transformer / LLM / multimodal / RAG phishing-detection techniques.</a:t>
-            </a:r>
-          </a:p>
-          <a:p>
-            <a:pPr algn="l">
+              <a:t>Build a safe URL-analysis + crawling pipeline (features, redirects, HTML, forms).</a:t>
+            </a:r>
+          </a:p>
+          <a:p>
+            <a:pPr>
               <a:spcAft>
-                <a:spcPts val="700"/>
+                <a:spcPts val="600"/>
               </a:spcAft>
             </a:pPr>
             <a:r>
-              <a:rPr sz="2000" b="1">
+              <a:rPr sz="1700" b="1">
                 <a:solidFill>
                   <a:srgbClr val="2E2E8F"/>
                 </a:solidFill>
@@ -7466,22 +7651,22 @@
               <a:t>▸ </a:t>
             </a:r>
             <a:r>
-              <a:rPr sz="2000" b="0">
+              <a:rPr sz="1700">
                 <a:solidFill>
                   <a:srgbClr val="202020"/>
                 </a:solidFill>
               </a:rPr>
-              <a:t>Design a safe URL-analysis and webpage-crawling pipeline (features, redirects, HTML, text, forms).</a:t>
-            </a:r>
-          </a:p>
-          <a:p>
-            <a:pPr algn="l">
+              <a:t>Add a lightweight RAG knowledge base of trusted security knowledge.</a:t>
+            </a:r>
+          </a:p>
+          <a:p>
+            <a:pPr>
               <a:spcAft>
-                <a:spcPts val="700"/>
+                <a:spcPts val="600"/>
               </a:spcAft>
             </a:pPr>
             <a:r>
-              <a:rPr sz="2000" b="1">
+              <a:rPr sz="1700" b="1">
                 <a:solidFill>
                   <a:srgbClr val="2E2E8F"/>
                 </a:solidFill>
@@ -7489,22 +7674,22 @@
               <a:t>▸ </a:t>
             </a:r>
             <a:r>
-              <a:rPr sz="2000" b="0">
+              <a:rPr sz="1700">
                 <a:solidFill>
                   <a:srgbClr val="202020"/>
                 </a:solidFill>
               </a:rPr>
-              <a:t>Build a lightweight RAG knowledge base of trusted security knowledge.</a:t>
-            </a:r>
-          </a:p>
-          <a:p>
-            <a:pPr algn="l">
+              <a:t>Score &amp; classify using structured evidence, not raw untrusted content.</a:t>
+            </a:r>
+          </a:p>
+          <a:p>
+            <a:pPr>
               <a:spcAft>
-                <a:spcPts val="700"/>
+                <a:spcPts val="600"/>
               </a:spcAft>
             </a:pPr>
             <a:r>
-              <a:rPr sz="2000" b="1">
+              <a:rPr sz="1700" b="1">
                 <a:solidFill>
                   <a:srgbClr val="2E2E8F"/>
                 </a:solidFill>
@@ -7512,22 +7697,22 @@
               <a:t>▸ </a:t>
             </a:r>
             <a:r>
-              <a:rPr sz="2000" b="0">
+              <a:rPr sz="1700">
                 <a:solidFill>
                   <a:srgbClr val="202020"/>
                 </a:solidFill>
               </a:rPr>
-              <a:t>Score and classify using structured evidence — not raw untrusted page content.</a:t>
-            </a:r>
-          </a:p>
-          <a:p>
-            <a:pPr algn="l">
+              <a:t>Add external intelligence: threat feeds and WHOIS/DNS/TLS with conflict scoring.</a:t>
+            </a:r>
+          </a:p>
+          <a:p>
+            <a:pPr>
               <a:spcAft>
-                <a:spcPts val="700"/>
+                <a:spcPts val="600"/>
               </a:spcAft>
             </a:pPr>
             <a:r>
-              <a:rPr sz="2000" b="1">
+              <a:rPr sz="1700" b="1">
                 <a:solidFill>
                   <a:srgbClr val="2E2E8F"/>
                 </a:solidFill>
@@ -7535,7 +7720,7 @@
               <a:t>▸ </a:t>
             </a:r>
             <a:r>
-              <a:rPr sz="2000" b="0">
+              <a:rPr sz="1700">
                 <a:solidFill>
                   <a:srgbClr val="202020"/>
                 </a:solidFill>
@@ -7544,13 +7729,13 @@
             </a:r>
           </a:p>
           <a:p>
-            <a:pPr algn="l">
+            <a:pPr>
               <a:spcAft>
-                <a:spcPts val="700"/>
+                <a:spcPts val="600"/>
               </a:spcAft>
             </a:pPr>
             <a:r>
-              <a:rPr sz="2000" b="1">
+              <a:rPr sz="1700" b="1">
                 <a:solidFill>
                   <a:srgbClr val="2E2E8F"/>
                 </a:solidFill>
@@ -7558,12 +7743,12 @@
               <a:t>▸ </a:t>
             </a:r>
             <a:r>
-              <a:rPr sz="2000" b="0">
+              <a:rPr sz="1700">
                 <a:solidFill>
                   <a:srgbClr val="202020"/>
                 </a:solidFill>
               </a:rPr>
-              <a:t>Evaluate: accuracy, precision, recall, F1, false-positive rate, latency, robustness.</a:t>
+              <a:t>Evaluate honestly with a reproducible harness (precision/recall/F1, error analysis).</a:t>
             </a:r>
           </a:p>
         </p:txBody>
@@ -7622,12 +7807,12 @@
           </a:fontRef>
         </p:style>
         <p:txBody>
-          <a:bodyPr rtlCol="0" anchor="ctr" wrap="square"/>
-          <a:lstStyle/>
-          <a:p>
-            <a:pPr algn="l"/>
-            <a:r>
-              <a:rPr sz="2600" b="1">
+          <a:bodyPr rtlCol="0" anchor="ctr"/>
+          <a:lstStyle/>
+          <a:p>
+            <a:pPr algn="ctr"/>
+            <a:r>
+              <a:rPr sz="2500" b="1">
                 <a:solidFill>
                   <a:srgbClr val="FFFFFF"/>
                 </a:solidFill>
@@ -7673,12 +7858,12 @@
           </a:fontRef>
         </p:style>
         <p:txBody>
-          <a:bodyPr rtlCol="0" anchor="ctr" tIns="25400" bIns="25400"/>
-          <a:lstStyle/>
-          <a:p>
-            <a:pPr algn="l"/>
-            <a:r>
-              <a:rPr sz="1100" b="1">
+          <a:bodyPr rtlCol="0" anchor="ctr"/>
+          <a:lstStyle/>
+          <a:p>
+            <a:pPr algn="ctr"/>
+            <a:r>
+              <a:rPr sz="1000" b="1">
                 <a:solidFill>
                   <a:srgbClr val="FFFFFF"/>
                 </a:solidFill>
@@ -7712,12 +7897,12 @@
           <a:p>
             <a:pPr algn="r"/>
             <a:r>
-              <a:rPr sz="1100" b="1">
+              <a:rPr sz="1000" b="1">
                 <a:solidFill>
                   <a:srgbClr val="FFFFFF"/>
                 </a:solidFill>
               </a:rPr>
-              <a:t>7/ 16</a:t>
+              <a:t>7/ 17</a:t>
             </a:r>
           </a:p>
         </p:txBody>
@@ -7730,8 +7915,8 @@
         </p:nvSpPr>
         <p:spPr>
           <a:xfrm>
-            <a:off x="502920" y="1051560"/>
-            <a:ext cx="8138160" cy="5120640"/>
+            <a:off x="502920" y="1005840"/>
+            <a:ext cx="8183879" cy="5212080"/>
           </a:xfrm>
           <a:prstGeom prst="rect">
             <a:avLst/>
@@ -7744,13 +7929,13 @@
           </a:bodyPr>
           <a:lstStyle/>
           <a:p>
-            <a:pPr algn="l">
+            <a:pPr>
               <a:spcAft>
-                <a:spcPts val="700"/>
+                <a:spcPts val="600"/>
               </a:spcAft>
             </a:pPr>
             <a:r>
-              <a:rPr sz="2000" b="1">
+              <a:rPr sz="1700" b="1">
                 <a:solidFill>
                   <a:srgbClr val="2E2E8F"/>
                 </a:solidFill>
@@ -7758,7 +7943,7 @@
               <a:t>▸ </a:t>
             </a:r>
             <a:r>
-              <a:rPr sz="2000" b="0">
+              <a:rPr sz="1700">
                 <a:solidFill>
                   <a:srgbClr val="202020"/>
                 </a:solidFill>
@@ -7767,13 +7952,13 @@
             </a:r>
           </a:p>
           <a:p>
-            <a:pPr algn="l">
+            <a:pPr>
               <a:spcAft>
-                <a:spcPts val="700"/>
+                <a:spcPts val="600"/>
               </a:spcAft>
             </a:pPr>
             <a:r>
-              <a:rPr sz="2000" b="1">
+              <a:rPr sz="1700" b="1">
                 <a:solidFill>
                   <a:srgbClr val="2E2E8F"/>
                 </a:solidFill>
@@ -7781,22 +7966,22 @@
               <a:t>▸ </a:t>
             </a:r>
             <a:r>
-              <a:rPr sz="2000" b="0">
+              <a:rPr sz="1700">
                 <a:solidFill>
                   <a:srgbClr val="202020"/>
                 </a:solidFill>
               </a:rPr>
-              <a:t>Flow: URL features → safe crawl → HTML + injection analysis → RAG retrieval → risk engine → explanation → verdict + report.</a:t>
-            </a:r>
-          </a:p>
-          <a:p>
-            <a:pPr algn="l">
+              <a:t>Flow: URL features → safe crawl → HTML + injection → threat/domain intel → RAG → risk engine → explanation.</a:t>
+            </a:r>
+          </a:p>
+          <a:p>
+            <a:pPr>
               <a:spcAft>
-                <a:spcPts val="700"/>
+                <a:spcPts val="600"/>
               </a:spcAft>
             </a:pPr>
             <a:r>
-              <a:rPr sz="2000" b="1">
+              <a:rPr sz="1700" b="1">
                 <a:solidFill>
                   <a:srgbClr val="2E2E8F"/>
                 </a:solidFill>
@@ -7804,22 +7989,22 @@
               <a:t>▸ </a:t>
             </a:r>
             <a:r>
-              <a:rPr sz="2000" b="0">
+              <a:rPr sz="1700">
                 <a:solidFill>
                   <a:srgbClr val="202020"/>
                 </a:solidFill>
               </a:rPr>
-              <a:t>Evidence-conditioned scoring: retrieved knowledge adds risk only if a matching indicator was actually observed.</a:t>
-            </a:r>
-          </a:p>
-          <a:p>
-            <a:pPr algn="l">
+              <a:t>Evidence-conditioned scoring: retrieved knowledge adds risk only when a matching indicator was observed.</a:t>
+            </a:r>
+          </a:p>
+          <a:p>
+            <a:pPr>
               <a:spcAft>
-                <a:spcPts val="700"/>
+                <a:spcPts val="600"/>
               </a:spcAft>
             </a:pPr>
             <a:r>
-              <a:rPr sz="2000" b="1">
+              <a:rPr sz="1700" b="1">
                 <a:solidFill>
                   <a:srgbClr val="2E2E8F"/>
                 </a:solidFill>
@@ -7827,22 +8012,22 @@
               <a:t>▸ </a:t>
             </a:r>
             <a:r>
-              <a:rPr sz="2000" b="0">
+              <a:rPr sz="1700">
                 <a:solidFill>
                   <a:srgbClr val="202020"/>
                 </a:solidFill>
               </a:rPr>
-              <a:t>Transparent rule-based score with centralized weights and a per-category breakdown.</a:t>
-            </a:r>
-          </a:p>
-          <a:p>
-            <a:pPr algn="l">
+              <a:t>Transparent rule engine: centralized weights, 11-category breakdown; bands 0–29 Safe / 30–59 Caution / 60–100 High Risk.</a:t>
+            </a:r>
+          </a:p>
+          <a:p>
+            <a:pPr>
               <a:spcAft>
-                <a:spcPts val="700"/>
+                <a:spcPts val="600"/>
               </a:spcAft>
             </a:pPr>
             <a:r>
-              <a:rPr sz="2000" b="1">
+              <a:rPr sz="1700" b="1">
                 <a:solidFill>
                   <a:srgbClr val="2E2E8F"/>
                 </a:solidFill>
@@ -7850,12 +8035,12 @@
               <a:t>▸ </a:t>
             </a:r>
             <a:r>
-              <a:rPr sz="2000" b="0">
+              <a:rPr sz="1700">
                 <a:solidFill>
                   <a:srgbClr val="202020"/>
                 </a:solidFill>
               </a:rPr>
-              <a:t>All webpage content handled as untrusted evidence (see architecture, next slide).</a:t>
+              <a:t>All webpage &amp; OCR content handled as untrusted evidence (never executed or obeyed).</a:t>
             </a:r>
           </a:p>
         </p:txBody>
@@ -7914,12 +8099,12 @@
           </a:fontRef>
         </p:style>
         <p:txBody>
-          <a:bodyPr rtlCol="0" anchor="ctr" wrap="square"/>
-          <a:lstStyle/>
-          <a:p>
-            <a:pPr algn="l"/>
-            <a:r>
-              <a:rPr sz="2600" b="1">
+          <a:bodyPr rtlCol="0" anchor="ctr"/>
+          <a:lstStyle/>
+          <a:p>
+            <a:pPr algn="ctr"/>
+            <a:r>
+              <a:rPr sz="2500" b="1">
                 <a:solidFill>
                   <a:srgbClr val="FFFFFF"/>
                 </a:solidFill>
@@ -7965,12 +8150,12 @@
           </a:fontRef>
         </p:style>
         <p:txBody>
-          <a:bodyPr rtlCol="0" anchor="ctr" tIns="25400" bIns="25400"/>
-          <a:lstStyle/>
-          <a:p>
-            <a:pPr algn="l"/>
-            <a:r>
-              <a:rPr sz="1100" b="1">
+          <a:bodyPr rtlCol="0" anchor="ctr"/>
+          <a:lstStyle/>
+          <a:p>
+            <a:pPr algn="ctr"/>
+            <a:r>
+              <a:rPr sz="1000" b="1">
                 <a:solidFill>
                   <a:srgbClr val="FFFFFF"/>
                 </a:solidFill>
@@ -8004,12 +8189,12 @@
           <a:p>
             <a:pPr algn="r"/>
             <a:r>
-              <a:rPr sz="1100" b="1">
+              <a:rPr sz="1000" b="1">
                 <a:solidFill>
                   <a:srgbClr val="FFFFFF"/>
                 </a:solidFill>
               </a:rPr>
-              <a:t>8/ 16</a:t>
+              <a:t>8/ 17</a:t>
             </a:r>
           </a:p>
         </p:txBody>
@@ -8051,12 +8236,12 @@
           </a:fontRef>
         </p:style>
         <p:txBody>
-          <a:bodyPr rtlCol="0" anchor="ctr" wrap="square" tIns="38100" bIns="38100"/>
+          <a:bodyPr rtlCol="0" anchor="ctr" wrap="square"/>
           <a:lstStyle/>
           <a:p>
             <a:pPr algn="ctr"/>
             <a:r>
-              <a:rPr sz="1200" b="1">
+              <a:rPr sz="1100" b="1">
                 <a:solidFill>
                   <a:srgbClr val="FFFFFF"/>
                 </a:solidFill>
@@ -8114,17 +8299,17 @@
           </a:fontRef>
         </p:style>
         <p:txBody>
-          <a:bodyPr rtlCol="0" anchor="ctr" wrap="square" tIns="38100" bIns="38100"/>
+          <a:bodyPr rtlCol="0" anchor="ctr" wrap="square"/>
           <a:lstStyle/>
           <a:p>
             <a:pPr algn="ctr"/>
             <a:r>
-              <a:rPr sz="1200" b="1">
+              <a:rPr sz="1100" b="1">
                 <a:solidFill>
                   <a:srgbClr val="FFFFFF"/>
                 </a:solidFill>
               </a:rPr>
-              <a:t>Evidence Extraction</a:t>
+              <a:t>Evidence extraction</a:t>
             </a:r>
           </a:p>
           <a:p>
@@ -8135,7 +8320,7 @@
                   <a:srgbClr val="FFFFFF"/>
                 </a:solidFill>
               </a:rPr>
-              <a:t>URL features · safe crawl · HTML · injection</a:t>
+              <a:t>URL · crawl · HTML · injection</a:t>
             </a:r>
           </a:p>
         </p:txBody>
@@ -8149,6 +8334,264 @@
         <p:spPr>
           <a:xfrm>
             <a:off x="6400800" y="1234440"/>
+            <a:ext cx="2331720" cy="868680"/>
+          </a:xfrm>
+          <a:prstGeom prst="roundRect">
+            <a:avLst/>
+          </a:prstGeom>
+          <a:solidFill>
+            <a:srgbClr val="0E7C86"/>
+          </a:solidFill>
+          <a:ln>
+            <a:noFill/>
+          </a:ln>
+          <a:effectLst/>
+        </p:spPr>
+        <p:style>
+          <a:lnRef idx="1">
+            <a:schemeClr val="accent1"/>
+          </a:lnRef>
+          <a:fillRef idx="3">
+            <a:schemeClr val="accent1"/>
+          </a:fillRef>
+          <a:effectRef idx="2">
+            <a:schemeClr val="accent1"/>
+          </a:effectRef>
+          <a:fontRef idx="minor">
+            <a:schemeClr val="lt1"/>
+          </a:fontRef>
+        </p:style>
+        <p:txBody>
+          <a:bodyPr rtlCol="0" anchor="ctr" wrap="square"/>
+          <a:lstStyle/>
+          <a:p>
+            <a:pPr algn="ctr"/>
+            <a:r>
+              <a:rPr sz="1100" b="1">
+                <a:solidFill>
+                  <a:srgbClr val="FFFFFF"/>
+                </a:solidFill>
+              </a:rPr>
+              <a:t>Threat + domain intel</a:t>
+            </a:r>
+          </a:p>
+          <a:p>
+            <a:pPr algn="ctr"/>
+            <a:r>
+              <a:rPr sz="800">
+                <a:solidFill>
+                  <a:srgbClr val="FFFFFF"/>
+                </a:solidFill>
+              </a:rPr>
+              <a:t>OpenPhish · WHOIS/DNS/TLS</a:t>
+            </a:r>
+          </a:p>
+        </p:txBody>
+      </p:sp>
+      <p:sp>
+        <p:nvSpPr>
+          <p:cNvPr id="8" name="Right Arrow 7"/>
+          <p:cNvSpPr/>
+          <p:nvPr/>
+        </p:nvSpPr>
+        <p:spPr>
+          <a:xfrm>
+            <a:off x="2697480" y="1517904"/>
+            <a:ext cx="566928" cy="310896"/>
+          </a:xfrm>
+          <a:prstGeom prst="rightArrow">
+            <a:avLst/>
+          </a:prstGeom>
+          <a:solidFill>
+            <a:srgbClr val="707070"/>
+          </a:solidFill>
+          <a:ln>
+            <a:noFill/>
+          </a:ln>
+          <a:effectLst/>
+        </p:spPr>
+        <p:style>
+          <a:lnRef idx="1">
+            <a:schemeClr val="accent1"/>
+          </a:lnRef>
+          <a:fillRef idx="3">
+            <a:schemeClr val="accent1"/>
+          </a:fillRef>
+          <a:effectRef idx="2">
+            <a:schemeClr val="accent1"/>
+          </a:effectRef>
+          <a:fontRef idx="minor">
+            <a:schemeClr val="lt1"/>
+          </a:fontRef>
+        </p:style>
+        <p:txBody>
+          <a:bodyPr rtlCol="0" anchor="ctr"/>
+          <a:lstStyle/>
+          <a:p>
+            <a:pPr algn="ctr"/>
+          </a:p>
+        </p:txBody>
+      </p:sp>
+      <p:sp>
+        <p:nvSpPr>
+          <p:cNvPr id="9" name="Right Arrow 8"/>
+          <p:cNvSpPr/>
+          <p:nvPr/>
+        </p:nvSpPr>
+        <p:spPr>
+          <a:xfrm>
+            <a:off x="5715000" y="1517904"/>
+            <a:ext cx="621792" cy="310896"/>
+          </a:xfrm>
+          <a:prstGeom prst="rightArrow">
+            <a:avLst/>
+          </a:prstGeom>
+          <a:solidFill>
+            <a:srgbClr val="707070"/>
+          </a:solidFill>
+          <a:ln>
+            <a:noFill/>
+          </a:ln>
+          <a:effectLst/>
+        </p:spPr>
+        <p:style>
+          <a:lnRef idx="1">
+            <a:schemeClr val="accent1"/>
+          </a:lnRef>
+          <a:fillRef idx="3">
+            <a:schemeClr val="accent1"/>
+          </a:fillRef>
+          <a:effectRef idx="2">
+            <a:schemeClr val="accent1"/>
+          </a:effectRef>
+          <a:fontRef idx="minor">
+            <a:schemeClr val="lt1"/>
+          </a:fontRef>
+        </p:style>
+        <p:txBody>
+          <a:bodyPr rtlCol="0" anchor="ctr"/>
+          <a:lstStyle/>
+          <a:p>
+            <a:pPr algn="ctr"/>
+          </a:p>
+        </p:txBody>
+      </p:sp>
+      <p:sp>
+        <p:nvSpPr>
+          <p:cNvPr id="10" name="Down Arrow 9"/>
+          <p:cNvSpPr/>
+          <p:nvPr/>
+        </p:nvSpPr>
+        <p:spPr>
+          <a:xfrm>
+            <a:off x="7269480" y="2148840"/>
+            <a:ext cx="594360" cy="548640"/>
+          </a:xfrm>
+          <a:prstGeom prst="downArrow">
+            <a:avLst/>
+          </a:prstGeom>
+          <a:solidFill>
+            <a:srgbClr val="707070"/>
+          </a:solidFill>
+          <a:ln>
+            <a:noFill/>
+          </a:ln>
+          <a:effectLst/>
+        </p:spPr>
+        <p:style>
+          <a:lnRef idx="1">
+            <a:schemeClr val="accent1"/>
+          </a:lnRef>
+          <a:fillRef idx="3">
+            <a:schemeClr val="accent1"/>
+          </a:fillRef>
+          <a:effectRef idx="2">
+            <a:schemeClr val="accent1"/>
+          </a:effectRef>
+          <a:fontRef idx="minor">
+            <a:schemeClr val="lt1"/>
+          </a:fontRef>
+        </p:style>
+        <p:txBody>
+          <a:bodyPr rtlCol="0" anchor="ctr"/>
+          <a:lstStyle/>
+          <a:p>
+            <a:pPr algn="ctr"/>
+          </a:p>
+        </p:txBody>
+      </p:sp>
+      <p:sp>
+        <p:nvSpPr>
+          <p:cNvPr id="11" name="Rounded Rectangle 10"/>
+          <p:cNvSpPr/>
+          <p:nvPr/>
+        </p:nvSpPr>
+        <p:spPr>
+          <a:xfrm>
+            <a:off x="6400800" y="2788920"/>
+            <a:ext cx="2331720" cy="868680"/>
+          </a:xfrm>
+          <a:prstGeom prst="roundRect">
+            <a:avLst/>
+          </a:prstGeom>
+          <a:solidFill>
+            <a:srgbClr val="E11D48"/>
+          </a:solidFill>
+          <a:ln>
+            <a:noFill/>
+          </a:ln>
+          <a:effectLst/>
+        </p:spPr>
+        <p:style>
+          <a:lnRef idx="1">
+            <a:schemeClr val="accent1"/>
+          </a:lnRef>
+          <a:fillRef idx="3">
+            <a:schemeClr val="accent1"/>
+          </a:fillRef>
+          <a:effectRef idx="2">
+            <a:schemeClr val="accent1"/>
+          </a:effectRef>
+          <a:fontRef idx="minor">
+            <a:schemeClr val="lt1"/>
+          </a:fontRef>
+        </p:style>
+        <p:txBody>
+          <a:bodyPr rtlCol="0" anchor="ctr" wrap="square"/>
+          <a:lstStyle/>
+          <a:p>
+            <a:pPr algn="ctr"/>
+            <a:r>
+              <a:rPr sz="1100" b="1">
+                <a:solidFill>
+                  <a:srgbClr val="FFFFFF"/>
+                </a:solidFill>
+              </a:rPr>
+              <a:t>Risk engine</a:t>
+            </a:r>
+          </a:p>
+          <a:p>
+            <a:pPr algn="ctr"/>
+            <a:r>
+              <a:rPr sz="800">
+                <a:solidFill>
+                  <a:srgbClr val="FFFFFF"/>
+                </a:solidFill>
+              </a:rPr>
+              <a:t>0–100 · 11-cat breakdown</a:t>
+            </a:r>
+          </a:p>
+        </p:txBody>
+      </p:sp>
+      <p:sp>
+        <p:nvSpPr>
+          <p:cNvPr id="12" name="Rounded Rectangle 11"/>
+          <p:cNvSpPr/>
+          <p:nvPr/>
+        </p:nvSpPr>
+        <p:spPr>
+          <a:xfrm>
+            <a:off x="3337560" y="2788920"/>
             <a:ext cx="2331720" cy="868680"/>
           </a:xfrm>
           <a:prstGeom prst="roundRect">
@@ -8177,17 +8620,17 @@
           </a:fontRef>
         </p:style>
         <p:txBody>
-          <a:bodyPr rtlCol="0" anchor="ctr" wrap="square" tIns="38100" bIns="38100"/>
+          <a:bodyPr rtlCol="0" anchor="ctr" wrap="square"/>
           <a:lstStyle/>
           <a:p>
             <a:pPr algn="ctr"/>
             <a:r>
-              <a:rPr sz="1200" b="1">
+              <a:rPr sz="1100" b="1">
                 <a:solidFill>
                   <a:srgbClr val="FFFFFF"/>
                 </a:solidFill>
               </a:rPr>
-              <a:t>RAG Retriever</a:t>
+              <a:t>RAG retriever</a:t>
             </a:r>
           </a:p>
           <a:p>
@@ -8205,16 +8648,79 @@
       </p:sp>
       <p:sp>
         <p:nvSpPr>
-          <p:cNvPr id="8" name="Right Arrow 7"/>
+          <p:cNvPr id="13" name="Rounded Rectangle 12"/>
           <p:cNvSpPr/>
           <p:nvPr/>
         </p:nvSpPr>
         <p:spPr>
           <a:xfrm>
-            <a:off x="2697480" y="1517904"/>
-            <a:ext cx="566928" cy="310896"/>
-          </a:xfrm>
-          <a:prstGeom prst="rightArrow">
+            <a:off x="411480" y="2788920"/>
+            <a:ext cx="2331720" cy="868680"/>
+          </a:xfrm>
+          <a:prstGeom prst="roundRect">
+            <a:avLst/>
+          </a:prstGeom>
+          <a:solidFill>
+            <a:srgbClr val="4F46E5"/>
+          </a:solidFill>
+          <a:ln>
+            <a:noFill/>
+          </a:ln>
+          <a:effectLst/>
+        </p:spPr>
+        <p:style>
+          <a:lnRef idx="1">
+            <a:schemeClr val="accent1"/>
+          </a:lnRef>
+          <a:fillRef idx="3">
+            <a:schemeClr val="accent1"/>
+          </a:fillRef>
+          <a:effectRef idx="2">
+            <a:schemeClr val="accent1"/>
+          </a:effectRef>
+          <a:fontRef idx="minor">
+            <a:schemeClr val="lt1"/>
+          </a:fontRef>
+        </p:style>
+        <p:txBody>
+          <a:bodyPr rtlCol="0" anchor="ctr" wrap="square"/>
+          <a:lstStyle/>
+          <a:p>
+            <a:pPr algn="ctr"/>
+            <a:r>
+              <a:rPr sz="1100" b="1">
+                <a:solidFill>
+                  <a:srgbClr val="FFFFFF"/>
+                </a:solidFill>
+              </a:rPr>
+              <a:t>Explainer</a:t>
+            </a:r>
+          </a:p>
+          <a:p>
+            <a:pPr algn="ctr"/>
+            <a:r>
+              <a:rPr sz="800">
+                <a:solidFill>
+                  <a:srgbClr val="FFFFFF"/>
+                </a:solidFill>
+              </a:rPr>
+              <a:t>evidence-grounded</a:t>
+            </a:r>
+          </a:p>
+        </p:txBody>
+      </p:sp>
+      <p:sp>
+        <p:nvSpPr>
+          <p:cNvPr id="14" name="Left Arrow 13"/>
+          <p:cNvSpPr/>
+          <p:nvPr/>
+        </p:nvSpPr>
+        <p:spPr>
+          <a:xfrm>
+            <a:off x="5715000" y="3072384"/>
+            <a:ext cx="621792" cy="310896"/>
+          </a:xfrm>
+          <a:prstGeom prst="leftArrow">
             <a:avLst/>
           </a:prstGeom>
           <a:solidFill>
@@ -8249,16 +8755,16 @@
       </p:sp>
       <p:sp>
         <p:nvSpPr>
-          <p:cNvPr id="9" name="Right Arrow 8"/>
+          <p:cNvPr id="15" name="Left Arrow 14"/>
           <p:cNvSpPr/>
           <p:nvPr/>
         </p:nvSpPr>
         <p:spPr>
           <a:xfrm>
-            <a:off x="5715000" y="1517904"/>
-            <a:ext cx="621792" cy="310896"/>
-          </a:xfrm>
-          <a:prstGeom prst="rightArrow">
+            <a:off x="2697480" y="3072384"/>
+            <a:ext cx="566928" cy="310896"/>
+          </a:xfrm>
+          <a:prstGeom prst="leftArrow">
             <a:avLst/>
           </a:prstGeom>
           <a:solidFill>
@@ -8293,14 +8799,14 @@
       </p:sp>
       <p:sp>
         <p:nvSpPr>
-          <p:cNvPr id="10" name="Down Arrow 9"/>
+          <p:cNvPr id="16" name="Down Arrow 15"/>
           <p:cNvSpPr/>
           <p:nvPr/>
         </p:nvSpPr>
         <p:spPr>
           <a:xfrm>
-            <a:off x="7269480" y="2148840"/>
-            <a:ext cx="594360" cy="566928"/>
+            <a:off x="1325880" y="3703320"/>
+            <a:ext cx="566928" cy="502920"/>
           </a:xfrm>
           <a:prstGeom prst="downArrow">
             <a:avLst/>
@@ -8337,327 +8843,6 @@
       </p:sp>
       <p:sp>
         <p:nvSpPr>
-          <p:cNvPr id="11" name="Rounded Rectangle 10"/>
-          <p:cNvSpPr/>
-          <p:nvPr/>
-        </p:nvSpPr>
-        <p:spPr>
-          <a:xfrm>
-            <a:off x="6400800" y="2788920"/>
-            <a:ext cx="2331720" cy="868680"/>
-          </a:xfrm>
-          <a:prstGeom prst="roundRect">
-            <a:avLst/>
-          </a:prstGeom>
-          <a:solidFill>
-            <a:srgbClr val="E11D48"/>
-          </a:solidFill>
-          <a:ln>
-            <a:noFill/>
-          </a:ln>
-          <a:effectLst/>
-        </p:spPr>
-        <p:style>
-          <a:lnRef idx="1">
-            <a:schemeClr val="accent1"/>
-          </a:lnRef>
-          <a:fillRef idx="3">
-            <a:schemeClr val="accent1"/>
-          </a:fillRef>
-          <a:effectRef idx="2">
-            <a:schemeClr val="accent1"/>
-          </a:effectRef>
-          <a:fontRef idx="minor">
-            <a:schemeClr val="lt1"/>
-          </a:fontRef>
-        </p:style>
-        <p:txBody>
-          <a:bodyPr rtlCol="0" anchor="ctr" wrap="square" tIns="38100" bIns="38100"/>
-          <a:lstStyle/>
-          <a:p>
-            <a:pPr algn="ctr"/>
-            <a:r>
-              <a:rPr sz="1200" b="1">
-                <a:solidFill>
-                  <a:srgbClr val="FFFFFF"/>
-                </a:solidFill>
-              </a:rPr>
-              <a:t>Risk Engine</a:t>
-            </a:r>
-          </a:p>
-          <a:p>
-            <a:pPr algn="ctr"/>
-            <a:r>
-              <a:rPr sz="800">
-                <a:solidFill>
-                  <a:srgbClr val="FFFFFF"/>
-                </a:solidFill>
-              </a:rPr>
-              <a:t>0–100 · weighted · breakdown</a:t>
-            </a:r>
-          </a:p>
-        </p:txBody>
-      </p:sp>
-      <p:sp>
-        <p:nvSpPr>
-          <p:cNvPr id="12" name="Rounded Rectangle 11"/>
-          <p:cNvSpPr/>
-          <p:nvPr/>
-        </p:nvSpPr>
-        <p:spPr>
-          <a:xfrm>
-            <a:off x="3337560" y="2788920"/>
-            <a:ext cx="2331720" cy="868680"/>
-          </a:xfrm>
-          <a:prstGeom prst="roundRect">
-            <a:avLst/>
-          </a:prstGeom>
-          <a:solidFill>
-            <a:srgbClr val="4F46E5"/>
-          </a:solidFill>
-          <a:ln>
-            <a:noFill/>
-          </a:ln>
-          <a:effectLst/>
-        </p:spPr>
-        <p:style>
-          <a:lnRef idx="1">
-            <a:schemeClr val="accent1"/>
-          </a:lnRef>
-          <a:fillRef idx="3">
-            <a:schemeClr val="accent1"/>
-          </a:fillRef>
-          <a:effectRef idx="2">
-            <a:schemeClr val="accent1"/>
-          </a:effectRef>
-          <a:fontRef idx="minor">
-            <a:schemeClr val="lt1"/>
-          </a:fontRef>
-        </p:style>
-        <p:txBody>
-          <a:bodyPr rtlCol="0" anchor="ctr" wrap="square" tIns="38100" bIns="38100"/>
-          <a:lstStyle/>
-          <a:p>
-            <a:pPr algn="ctr"/>
-            <a:r>
-              <a:rPr sz="1200" b="1">
-                <a:solidFill>
-                  <a:srgbClr val="FFFFFF"/>
-                </a:solidFill>
-              </a:rPr>
-              <a:t>Explainer</a:t>
-            </a:r>
-          </a:p>
-          <a:p>
-            <a:pPr algn="ctr"/>
-            <a:r>
-              <a:rPr sz="800">
-                <a:solidFill>
-                  <a:srgbClr val="FFFFFF"/>
-                </a:solidFill>
-              </a:rPr>
-              <a:t>evidence-grounded · LLM-ready</a:t>
-            </a:r>
-          </a:p>
-        </p:txBody>
-      </p:sp>
-      <p:sp>
-        <p:nvSpPr>
-          <p:cNvPr id="13" name="Rounded Rectangle 12"/>
-          <p:cNvSpPr/>
-          <p:nvPr/>
-        </p:nvSpPr>
-        <p:spPr>
-          <a:xfrm>
-            <a:off x="411480" y="2788920"/>
-            <a:ext cx="2331720" cy="868680"/>
-          </a:xfrm>
-          <a:prstGeom prst="roundRect">
-            <a:avLst/>
-          </a:prstGeom>
-          <a:solidFill>
-            <a:srgbClr val="15803D"/>
-          </a:solidFill>
-          <a:ln>
-            <a:noFill/>
-          </a:ln>
-          <a:effectLst/>
-        </p:spPr>
-        <p:style>
-          <a:lnRef idx="1">
-            <a:schemeClr val="accent1"/>
-          </a:lnRef>
-          <a:fillRef idx="3">
-            <a:schemeClr val="accent1"/>
-          </a:fillRef>
-          <a:effectRef idx="2">
-            <a:schemeClr val="accent1"/>
-          </a:effectRef>
-          <a:fontRef idx="minor">
-            <a:schemeClr val="lt1"/>
-          </a:fontRef>
-        </p:style>
-        <p:txBody>
-          <a:bodyPr rtlCol="0" anchor="ctr" wrap="square" tIns="38100" bIns="38100"/>
-          <a:lstStyle/>
-          <a:p>
-            <a:pPr algn="ctr"/>
-            <a:r>
-              <a:rPr sz="1200" b="1">
-                <a:solidFill>
-                  <a:srgbClr val="FFFFFF"/>
-                </a:solidFill>
-              </a:rPr>
-              <a:t>Verdict + Report</a:t>
-            </a:r>
-          </a:p>
-          <a:p>
-            <a:pPr algn="ctr"/>
-            <a:r>
-              <a:rPr sz="800">
-                <a:solidFill>
-                  <a:srgbClr val="FFFFFF"/>
-                </a:solidFill>
-              </a:rPr>
-              <a:t>score · JSON / Markdown</a:t>
-            </a:r>
-          </a:p>
-        </p:txBody>
-      </p:sp>
-      <p:sp>
-        <p:nvSpPr>
-          <p:cNvPr id="14" name="Left Arrow 13"/>
-          <p:cNvSpPr/>
-          <p:nvPr/>
-        </p:nvSpPr>
-        <p:spPr>
-          <a:xfrm>
-            <a:off x="5715000" y="3072384"/>
-            <a:ext cx="621792" cy="310896"/>
-          </a:xfrm>
-          <a:prstGeom prst="leftArrow">
-            <a:avLst/>
-          </a:prstGeom>
-          <a:solidFill>
-            <a:srgbClr val="707070"/>
-          </a:solidFill>
-          <a:ln>
-            <a:noFill/>
-          </a:ln>
-          <a:effectLst/>
-        </p:spPr>
-        <p:style>
-          <a:lnRef idx="1">
-            <a:schemeClr val="accent1"/>
-          </a:lnRef>
-          <a:fillRef idx="3">
-            <a:schemeClr val="accent1"/>
-          </a:fillRef>
-          <a:effectRef idx="2">
-            <a:schemeClr val="accent1"/>
-          </a:effectRef>
-          <a:fontRef idx="minor">
-            <a:schemeClr val="lt1"/>
-          </a:fontRef>
-        </p:style>
-        <p:txBody>
-          <a:bodyPr rtlCol="0" anchor="ctr"/>
-          <a:lstStyle/>
-          <a:p>
-            <a:pPr algn="ctr"/>
-          </a:p>
-        </p:txBody>
-      </p:sp>
-      <p:sp>
-        <p:nvSpPr>
-          <p:cNvPr id="15" name="Left Arrow 14"/>
-          <p:cNvSpPr/>
-          <p:nvPr/>
-        </p:nvSpPr>
-        <p:spPr>
-          <a:xfrm>
-            <a:off x="2697480" y="3072384"/>
-            <a:ext cx="566928" cy="310896"/>
-          </a:xfrm>
-          <a:prstGeom prst="leftArrow">
-            <a:avLst/>
-          </a:prstGeom>
-          <a:solidFill>
-            <a:srgbClr val="707070"/>
-          </a:solidFill>
-          <a:ln>
-            <a:noFill/>
-          </a:ln>
-          <a:effectLst/>
-        </p:spPr>
-        <p:style>
-          <a:lnRef idx="1">
-            <a:schemeClr val="accent1"/>
-          </a:lnRef>
-          <a:fillRef idx="3">
-            <a:schemeClr val="accent1"/>
-          </a:fillRef>
-          <a:effectRef idx="2">
-            <a:schemeClr val="accent1"/>
-          </a:effectRef>
-          <a:fontRef idx="minor">
-            <a:schemeClr val="lt1"/>
-          </a:fontRef>
-        </p:style>
-        <p:txBody>
-          <a:bodyPr rtlCol="0" anchor="ctr"/>
-          <a:lstStyle/>
-          <a:p>
-            <a:pPr algn="ctr"/>
-          </a:p>
-        </p:txBody>
-      </p:sp>
-      <p:sp>
-        <p:nvSpPr>
-          <p:cNvPr id="16" name="Down Arrow 15"/>
-          <p:cNvSpPr/>
-          <p:nvPr/>
-        </p:nvSpPr>
-        <p:spPr>
-          <a:xfrm>
-            <a:off x="1325880" y="3703320"/>
-            <a:ext cx="566928" cy="502920"/>
-          </a:xfrm>
-          <a:prstGeom prst="downArrow">
-            <a:avLst/>
-          </a:prstGeom>
-          <a:solidFill>
-            <a:srgbClr val="707070"/>
-          </a:solidFill>
-          <a:ln>
-            <a:noFill/>
-          </a:ln>
-          <a:effectLst/>
-        </p:spPr>
-        <p:style>
-          <a:lnRef idx="1">
-            <a:schemeClr val="accent1"/>
-          </a:lnRef>
-          <a:fillRef idx="3">
-            <a:schemeClr val="accent1"/>
-          </a:fillRef>
-          <a:effectRef idx="2">
-            <a:schemeClr val="accent1"/>
-          </a:effectRef>
-          <a:fontRef idx="minor">
-            <a:schemeClr val="lt1"/>
-          </a:fontRef>
-        </p:style>
-        <p:txBody>
-          <a:bodyPr rtlCol="0" anchor="ctr"/>
-          <a:lstStyle/>
-          <a:p>
-            <a:pPr algn="ctr"/>
-          </a:p>
-        </p:txBody>
-      </p:sp>
-      <p:sp>
-        <p:nvSpPr>
           <p:cNvPr id="17" name="Rounded Rectangle 16"/>
           <p:cNvSpPr/>
           <p:nvPr/>
@@ -8693,12 +8878,12 @@
           </a:fontRef>
         </p:style>
         <p:txBody>
-          <a:bodyPr rtlCol="0" anchor="ctr" wrap="square" tIns="38100" bIns="38100"/>
+          <a:bodyPr rtlCol="0" anchor="ctr" wrap="square"/>
           <a:lstStyle/>
           <a:p>
             <a:pPr algn="ctr"/>
             <a:r>
-              <a:rPr sz="1200" b="1">
+              <a:rPr sz="1100" b="1">
                 <a:solidFill>
                   <a:srgbClr val="FFFFFF"/>
                 </a:solidFill>
@@ -8745,12 +8930,12 @@
           </a:fontRef>
         </p:style>
         <p:txBody>
-          <a:bodyPr rtlCol="0" anchor="ctr" wrap="square" tIns="38100" bIns="38100"/>
+          <a:bodyPr rtlCol="0" anchor="ctr" wrap="square"/>
           <a:lstStyle/>
           <a:p>
             <a:pPr algn="ctr"/>
             <a:r>
-              <a:rPr sz="1200" b="1">
+              <a:rPr sz="1100" b="1">
                 <a:solidFill>
                   <a:srgbClr val="FFFFFF"/>
                 </a:solidFill>
@@ -8795,12 +8980,12 @@
           <a:p>
             <a:pPr algn="ctr"/>
             <a:r>
-              <a:rPr sz="1300" i="1">
+              <a:rPr sz="1200" i="1">
                 <a:solidFill>
                   <a:srgbClr val="555555"/>
                 </a:solidFill>
               </a:rPr>
-              <a:t>All webpage content is treated as untrusted evidence — flagged but never executed or obeyed.</a:t>
+              <a:t>Optional stages (Playwright render, multimodal OCR, dynamic cloaking, embedding RAG) plug in but are OFF by default.</a:t>
             </a:r>
           </a:p>
         </p:txBody>
@@ -8859,17 +9044,17 @@
           </a:fontRef>
         </p:style>
         <p:txBody>
-          <a:bodyPr rtlCol="0" anchor="ctr" wrap="square"/>
-          <a:lstStyle/>
-          <a:p>
-            <a:pPr algn="l"/>
-            <a:r>
-              <a:rPr sz="2600" b="1">
+          <a:bodyPr rtlCol="0" anchor="ctr"/>
+          <a:lstStyle/>
+          <a:p>
+            <a:pPr algn="ctr"/>
+            <a:r>
+              <a:rPr sz="2500" b="1">
                 <a:solidFill>
                   <a:srgbClr val="FFFFFF"/>
                 </a:solidFill>
               </a:rPr>
-              <a:t>  7.  Work Done So Far  (≈ 55%)</a:t>
+              <a:t>  7.  Status — ON by default</a:t>
             </a:r>
           </a:p>
         </p:txBody>
@@ -8910,12 +9095,12 @@
           </a:fontRef>
         </p:style>
         <p:txBody>
-          <a:bodyPr rtlCol="0" anchor="ctr" tIns="25400" bIns="25400"/>
-          <a:lstStyle/>
-          <a:p>
-            <a:pPr algn="l"/>
-            <a:r>
-              <a:rPr sz="1100" b="1">
+          <a:bodyPr rtlCol="0" anchor="ctr"/>
+          <a:lstStyle/>
+          <a:p>
+            <a:pPr algn="ctr"/>
+            <a:r>
+              <a:rPr sz="1000" b="1">
                 <a:solidFill>
                   <a:srgbClr val="FFFFFF"/>
                 </a:solidFill>
@@ -8949,12 +9134,12 @@
           <a:p>
             <a:pPr algn="r"/>
             <a:r>
-              <a:rPr sz="1100" b="1">
+              <a:rPr sz="1000" b="1">
                 <a:solidFill>
                   <a:srgbClr val="FFFFFF"/>
                 </a:solidFill>
               </a:rPr>
-              <a:t>9/ 16</a:t>
+              <a:t>9/ 17</a:t>
             </a:r>
           </a:p>
         </p:txBody>
@@ -8967,8 +9152,8 @@
         </p:nvSpPr>
         <p:spPr>
           <a:xfrm>
-            <a:off x="502920" y="1051560"/>
-            <a:ext cx="8138160" cy="5120640"/>
+            <a:off x="640080" y="868680"/>
+            <a:ext cx="7863840" cy="457200"/>
           </a:xfrm>
           <a:prstGeom prst="rect">
             <a:avLst/>
@@ -8976,18 +9161,52 @@
           <a:noFill/>
         </p:spPr>
         <p:txBody>
+          <a:bodyPr wrap="none">
+            <a:spAutoFit/>
+          </a:bodyPr>
+          <a:lstStyle/>
+          <a:p>
+            <a:pPr algn="ctr"/>
+            <a:r>
+              <a:rPr sz="1300" b="1" i="0">
+                <a:solidFill>
+                  <a:srgbClr val="15803D"/>
+                </a:solidFill>
+              </a:rPr>
+              <a:t>11 of ~24 planned capabilities run by default</a:t>
+            </a:r>
+          </a:p>
+        </p:txBody>
+      </p:sp>
+      <p:sp>
+        <p:nvSpPr>
+          <p:cNvPr id="6" name="TextBox 5"/>
+          <p:cNvSpPr txBox="1"/>
+          <p:nvPr/>
+        </p:nvSpPr>
+        <p:spPr>
+          <a:xfrm>
+            <a:off x="502920" y="1234440"/>
+            <a:ext cx="8183879" cy="5212080"/>
+          </a:xfrm>
+          <a:prstGeom prst="rect">
+            <a:avLst/>
+          </a:prstGeom>
+          <a:noFill/>
+        </p:spPr>
+        <p:txBody>
           <a:bodyPr wrap="square">
             <a:spAutoFit/>
           </a:bodyPr>
           <a:lstStyle/>
           <a:p>
-            <a:pPr algn="l">
+            <a:pPr>
               <a:spcAft>
-                <a:spcPts val="700"/>
+                <a:spcPts val="600"/>
               </a:spcAft>
             </a:pPr>
             <a:r>
-              <a:rPr sz="1800" b="1">
+              <a:rPr sz="1500" b="1">
                 <a:solidFill>
                   <a:srgbClr val="2E2E8F"/>
                 </a:solidFill>
@@ -8995,22 +9214,22 @@
               <a:t>▸ </a:t>
             </a:r>
             <a:r>
-              <a:rPr sz="1800" b="0">
+              <a:rPr sz="1500">
                 <a:solidFill>
                   <a:srgbClr val="202020"/>
                 </a:solidFill>
               </a:rPr>
-              <a:t>URL analysis: HTTPS-first normalization, IP / @ / punycode, subdomains, shorteners, entropy.</a:t>
-            </a:r>
-          </a:p>
-          <a:p>
-            <a:pPr algn="l">
+              <a:t>URL / lexical analysis (HTTPS-first; impersonation &amp; lookalike/typosquat; suspicious TLDs).</a:t>
+            </a:r>
+          </a:p>
+          <a:p>
+            <a:pPr>
               <a:spcAft>
-                <a:spcPts val="700"/>
+                <a:spcPts val="600"/>
               </a:spcAft>
             </a:pPr>
             <a:r>
-              <a:rPr sz="1800" b="1">
+              <a:rPr sz="1500" b="1">
                 <a:solidFill>
                   <a:srgbClr val="2E2E8F"/>
                 </a:solidFill>
@@ -9018,22 +9237,22 @@
               <a:t>▸ </a:t>
             </a:r>
             <a:r>
-              <a:rPr sz="1800" b="0">
+              <a:rPr sz="1500">
                 <a:solidFill>
                   <a:srgbClr val="202020"/>
                 </a:solidFill>
               </a:rPr>
-              <a:t>Brand-impersonation in the URL (e.g. paypal.secure-login.net) — caught even if the page does not load.</a:t>
-            </a:r>
-          </a:p>
-          <a:p>
-            <a:pPr algn="l">
+              <a:t>Safe crawler (GET-only, bounded, no JS, no form submit) + offline sample mode.</a:t>
+            </a:r>
+          </a:p>
+          <a:p>
+            <a:pPr>
               <a:spcAft>
-                <a:spcPts val="700"/>
+                <a:spcPts val="600"/>
               </a:spcAft>
             </a:pPr>
             <a:r>
-              <a:rPr sz="1800" b="1">
+              <a:rPr sz="1500" b="1">
                 <a:solidFill>
                   <a:srgbClr val="2E2E8F"/>
                 </a:solidFill>
@@ -9041,22 +9260,22 @@
               <a:t>▸ </a:t>
             </a:r>
             <a:r>
-              <a:rPr sz="1800" b="0">
+              <a:rPr sz="1500">
                 <a:solidFill>
                   <a:srgbClr val="202020"/>
                 </a:solidFill>
               </a:rPr>
-              <a:t>Look-alike / typosquat detection (paypa1, g00gle) + suspicious-TLD scoring.</a:t>
-            </a:r>
-          </a:p>
-          <a:p>
-            <a:pPr algn="l">
+              <a:t>HTML analysis (forms, password fields, credential language) + brand-domain check.</a:t>
+            </a:r>
+          </a:p>
+          <a:p>
+            <a:pPr>
               <a:spcAft>
-                <a:spcPts val="700"/>
+                <a:spcPts val="600"/>
               </a:spcAft>
             </a:pPr>
             <a:r>
-              <a:rPr sz="1800" b="1">
+              <a:rPr sz="1500" b="1">
                 <a:solidFill>
                   <a:srgbClr val="2E2E8F"/>
                 </a:solidFill>
@@ -9064,22 +9283,22 @@
               <a:t>▸ </a:t>
             </a:r>
             <a:r>
-              <a:rPr sz="1800" b="0">
+              <a:rPr sz="1500">
                 <a:solidFill>
                   <a:srgbClr val="202020"/>
                 </a:solidFill>
               </a:rPr>
-              <a:t>Safe crawler, HTML analysis, and hidden-instruction (prompt-injection) detector.</a:t>
-            </a:r>
-          </a:p>
-          <a:p>
-            <a:pPr algn="l">
+              <a:t>Prompt-injection detection (visible + hidden content).</a:t>
+            </a:r>
+          </a:p>
+          <a:p>
+            <a:pPr>
               <a:spcAft>
-                <a:spcPts val="700"/>
+                <a:spcPts val="600"/>
               </a:spcAft>
             </a:pPr>
             <a:r>
-              <a:rPr sz="1800" b="1">
+              <a:rPr sz="1500" b="1">
                 <a:solidFill>
                   <a:srgbClr val="2E2E8F"/>
                 </a:solidFill>
@@ -9087,22 +9306,22 @@
               <a:t>▸ </a:t>
             </a:r>
             <a:r>
-              <a:rPr sz="1800" b="0">
+              <a:rPr sz="1500">
                 <a:solidFill>
                   <a:srgbClr val="202020"/>
                 </a:solidFill>
               </a:rPr>
-              <a:t>Local RAG (TF-IDF) + transparent risk engine with per-category score breakdown.</a:t>
-            </a:r>
-          </a:p>
-          <a:p>
-            <a:pPr algn="l">
+              <a:t>TF-IDF RAG retrieval over a local 22-entry knowledge base (evidence-conditioned).</a:t>
+            </a:r>
+          </a:p>
+          <a:p>
+            <a:pPr>
               <a:spcAft>
-                <a:spcPts val="700"/>
+                <a:spcPts val="600"/>
               </a:spcAft>
             </a:pPr>
             <a:r>
-              <a:rPr sz="1800" b="1">
+              <a:rPr sz="1500" b="1">
                 <a:solidFill>
                   <a:srgbClr val="2E2E8F"/>
                 </a:solidFill>
@@ -9110,22 +9329,22 @@
               <a:t>▸ </a:t>
             </a:r>
             <a:r>
-              <a:rPr sz="1800" b="0">
+              <a:rPr sz="1500">
                 <a:solidFill>
                   <a:srgbClr val="202020"/>
                 </a:solidFill>
               </a:rPr>
-              <a:t>Modern React 'Sentinel' UI + FastAPI; JSON / Markdown export.</a:t>
-            </a:r>
-          </a:p>
-          <a:p>
-            <a:pPr algn="l">
+              <a:t>Threat intelligence — OpenPhish feed (cached, offline-safe).</a:t>
+            </a:r>
+          </a:p>
+          <a:p>
+            <a:pPr>
               <a:spcAft>
-                <a:spcPts val="700"/>
+                <a:spcPts val="600"/>
               </a:spcAft>
             </a:pPr>
             <a:r>
-              <a:rPr sz="1800" b="1">
+              <a:rPr sz="1500" b="1">
                 <a:solidFill>
                   <a:srgbClr val="2E2E8F"/>
                 </a:solidFill>
@@ -9133,12 +9352,58 @@
               <a:t>▸ </a:t>
             </a:r>
             <a:r>
-              <a:rPr sz="1800" b="0">
+              <a:rPr sz="1500">
                 <a:solidFill>
                   <a:srgbClr val="202020"/>
                 </a:solidFill>
               </a:rPr>
-              <a:t>59 unit tests passing; verified end-to-end in a real browser.</a:t>
+              <a:t>Domain intelligence — WHOIS/DNS/TLS + cross-signal conflict layer.</a:t>
+            </a:r>
+          </a:p>
+          <a:p>
+            <a:pPr>
+              <a:spcAft>
+                <a:spcPts val="600"/>
+              </a:spcAft>
+            </a:pPr>
+            <a:r>
+              <a:rPr sz="1500" b="1">
+                <a:solidFill>
+                  <a:srgbClr val="2E2E8F"/>
+                </a:solidFill>
+              </a:rPr>
+              <a:t>▸ </a:t>
+            </a:r>
+            <a:r>
+              <a:rPr sz="1500">
+                <a:solidFill>
+                  <a:srgbClr val="202020"/>
+                </a:solidFill>
+              </a:rPr>
+              <a:t>Transparent rule engine (0–100, 11-category breakdown, trusted-domain allowlist).</a:t>
+            </a:r>
+          </a:p>
+          <a:p>
+            <a:pPr>
+              <a:spcAft>
+                <a:spcPts val="600"/>
+              </a:spcAft>
+            </a:pPr>
+            <a:r>
+              <a:rPr sz="1500" b="1">
+                <a:solidFill>
+                  <a:srgbClr val="2E2E8F"/>
+                </a:solidFill>
+              </a:rPr>
+              <a:t>▸ </a:t>
+            </a:r>
+            <a:r>
+              <a:rPr sz="1500">
+                <a:solidFill>
+                  <a:srgbClr val="202020"/>
+                </a:solidFill>
+              </a:rPr>
+              <a:t>Evidence-grounded explanation; two front-ends; JSON/Markdown export; 175 tests + eval harness.</a:t>
             </a:r>
           </a:p>
         </p:txBody>
